--- a/python/CourseDesign/Week06e/Week6_Lecture12_Upsampling_Interpolation_Rational_Rate_Changes.pptx
+++ b/python/CourseDesign/Week06e/Week6_Lecture12_Upsampling_Interpolation_Rational_Rate_Changes.pptx
@@ -4,6 +4,9 @@
   <p:sldMasterIdLst>
     <p:sldMasterId id="2147483648" r:id="rId1"/>
   </p:sldMasterIdLst>
+  <p:notesMasterIdLst>
+    <p:notesMasterId r:id="rId23"/>
+  </p:notesMasterIdLst>
   <p:sldIdLst>
     <p:sldId id="256" r:id="rId2"/>
     <p:sldId id="257" r:id="rId3"/>
@@ -27,9 +30,6 @@
     <p:sldId id="275" r:id="rId21"/>
     <p:sldId id="276" r:id="rId22"/>
   </p:sldIdLst>
-  <p:notesMasterIdLst>
-    <p:notesMasterId r:id="rId23"/>
-  </p:notesMasterIdLst>
   <p:sldSz cx="12192000" cy="6858000"/>
   <p:notesSz cx="6858000" cy="12192000"/>
   <p:defaultTextStyle>
@@ -124,6 +124,11 @@
       </a:defRPr>
     </a:lvl9pPr>
   </p:defaultTextStyle>
+  <p:extLst>
+    <p:ext uri="{EFAFB233-063F-42B5-8137-9DF3F51BA10A}">
+      <p15:sldGuideLst xmlns:p15="http://schemas.microsoft.com/office/powerpoint/2012/main"/>
+    </p:ext>
+  </p:extLst>
 </p:presentation>
 </file>
 
@@ -149,234 +154,10 @@
           <a:chExt cx="0" cy="0"/>
         </a:xfrm>
       </p:grpSpPr>
-      <p:sp>
-        <p:nvSpPr>
-          <p:cNvPr id="2" name="Header Placeholder 1"/>
-          <p:cNvSpPr>
-            <a:spLocks noGrp="1"/>
-          </p:cNvSpPr>
-          <p:nvPr>
-            <p:ph type="hdr" sz="quarter"/>
-          </p:nvPr>
-        </p:nvSpPr>
-        <p:spPr>
-          <a:xfrm>
-            <a:off x="0" y="0"/>
-            <a:ext cx="2971800" cy="458788"/>
-          </a:xfrm>
-          <a:prstGeom prst="rect">
-            <a:avLst/>
-          </a:prstGeom>
-        </p:spPr>
-        <p:txBody>
-          <a:bodyPr vert="horz" lIns="91440" tIns="45720" rIns="91440" bIns="45720" rtlCol="0"/>
-          <a:lstStyle>
-            <a:lvl1pPr algn="l">
-              <a:defRPr sz="1200"/>
-            </a:lvl1pPr>
-          </a:lstStyle>
-          <a:p>
-            <a:endParaRPr lang="en-US"/>
-          </a:p>
-        </p:txBody>
-      </p:sp>
-      <p:sp>
-        <p:nvSpPr>
-          <p:cNvPr id="3" name="Date Placeholder 2"/>
-          <p:cNvSpPr>
-            <a:spLocks noGrp="1"/>
-          </p:cNvSpPr>
-          <p:nvPr>
-            <p:ph type="dt" idx="1"/>
-          </p:nvPr>
-        </p:nvSpPr>
-        <p:spPr>
-          <a:xfrm>
-            <a:off x="3884613" y="0"/>
-            <a:ext cx="2971800" cy="458788"/>
-          </a:xfrm>
-          <a:prstGeom prst="rect">
-            <a:avLst/>
-          </a:prstGeom>
-        </p:spPr>
-        <p:txBody>
-          <a:bodyPr vert="horz" lIns="91440" tIns="45720" rIns="91440" bIns="45720" rtlCol="0"/>
-          <a:lstStyle>
-            <a:lvl1pPr algn="r">
-              <a:defRPr sz="1200"/>
-            </a:lvl1pPr>
-          </a:lstStyle>
-          <a:p>
-            <a:fld id="{5282F153-3F37-0F45-9E97-73ACFA13230C}" type="datetimeFigureOut">
-              <a:rPr lang="en-US"/>
-              <a:t>7/23/19</a:t>
-            </a:fld>
-            <a:endParaRPr lang="en-US"/>
-          </a:p>
-        </p:txBody>
-      </p:sp>
-      <p:sp>
-        <p:nvSpPr>
-          <p:cNvPr id="4" name="Slide Image Placeholder 3"/>
-          <p:cNvSpPr>
-            <a:spLocks noGrp="1" noRot="1" noChangeAspect="1"/>
-          </p:cNvSpPr>
-          <p:nvPr>
-            <p:ph type="sldImg" idx="2"/>
-          </p:nvPr>
-        </p:nvSpPr>
-        <p:spPr>
-          <a:xfrm>
-            <a:off x="685800" y="1143000"/>
-            <a:ext cx="5486400" cy="3086100"/>
-          </a:xfrm>
-          <a:prstGeom prst="rect">
-            <a:avLst/>
-          </a:prstGeom>
-          <a:noFill/>
-          <a:ln w="12700">
-            <a:solidFill>
-              <a:prstClr val="black"/>
-            </a:solidFill>
-          </a:ln>
-        </p:spPr>
-        <p:txBody>
-          <a:bodyPr vert="horz" lIns="91440" tIns="45720" rIns="91440" bIns="45720" rtlCol="0" anchor="ctr"/>
-          <a:lstStyle/>
-          <a:p>
-            <a:endParaRPr lang="en-US"/>
-          </a:p>
-        </p:txBody>
-      </p:sp>
-      <p:sp>
-        <p:nvSpPr>
-          <p:cNvPr id="5" name="Notes Placeholder 4"/>
-          <p:cNvSpPr>
-            <a:spLocks noGrp="1"/>
-          </p:cNvSpPr>
-          <p:nvPr>
-            <p:ph type="body" sz="quarter" idx="3"/>
-          </p:nvPr>
-        </p:nvSpPr>
-        <p:spPr>
-          <a:xfrm>
-            <a:off x="685800" y="4400550"/>
-            <a:ext cx="5486400" cy="3600450"/>
-          </a:xfrm>
-          <a:prstGeom prst="rect">
-            <a:avLst/>
-          </a:prstGeom>
-        </p:spPr>
-        <p:txBody>
-          <a:bodyPr vert="horz" lIns="91440" tIns="45720" rIns="91440" bIns="45720" rtlCol="0"/>
-          <a:lstStyle/>
-          <a:p>
-            <a:pPr lvl="0"/>
-            <a:r>
-              <a:rPr lang="en-US"/>
-              <a:t>Click to edit Master text styles</a:t>
-            </a:r>
-          </a:p>
-          <a:p>
-            <a:pPr lvl="1"/>
-            <a:r>
-              <a:rPr lang="en-US"/>
-              <a:t>Second level</a:t>
-            </a:r>
-          </a:p>
-          <a:p>
-            <a:pPr lvl="2"/>
-            <a:r>
-              <a:rPr lang="en-US"/>
-              <a:t>Third level</a:t>
-            </a:r>
-          </a:p>
-          <a:p>
-            <a:pPr lvl="3"/>
-            <a:r>
-              <a:rPr lang="en-US"/>
-              <a:t>Fourth level</a:t>
-            </a:r>
-          </a:p>
-          <a:p>
-            <a:pPr lvl="4"/>
-            <a:r>
-              <a:rPr lang="en-US"/>
-              <a:t>Fifth level</a:t>
-            </a:r>
-          </a:p>
-        </p:txBody>
-      </p:sp>
-      <p:sp>
-        <p:nvSpPr>
-          <p:cNvPr id="6" name="Footer Placeholder 5"/>
-          <p:cNvSpPr>
-            <a:spLocks noGrp="1"/>
-          </p:cNvSpPr>
-          <p:nvPr>
-            <p:ph type="ftr" sz="quarter" idx="4"/>
-          </p:nvPr>
-        </p:nvSpPr>
-        <p:spPr>
-          <a:xfrm>
-            <a:off x="0" y="8685213"/>
-            <a:ext cx="2971800" cy="458787"/>
-          </a:xfrm>
-          <a:prstGeom prst="rect">
-            <a:avLst/>
-          </a:prstGeom>
-        </p:spPr>
-        <p:txBody>
-          <a:bodyPr vert="horz" lIns="91440" tIns="45720" rIns="91440" bIns="45720" rtlCol="0" anchor="b"/>
-          <a:lstStyle>
-            <a:lvl1pPr algn="l">
-              <a:defRPr sz="1200"/>
-            </a:lvl1pPr>
-          </a:lstStyle>
-          <a:p>
-            <a:endParaRPr lang="en-US"/>
-          </a:p>
-        </p:txBody>
-      </p:sp>
-      <p:sp>
-        <p:nvSpPr>
-          <p:cNvPr id="7" name="Slide Number Placeholder 6"/>
-          <p:cNvSpPr>
-            <a:spLocks noGrp="1"/>
-          </p:cNvSpPr>
-          <p:nvPr>
-            <p:ph type="sldNum" sz="quarter" idx="5"/>
-          </p:nvPr>
-        </p:nvSpPr>
-        <p:spPr>
-          <a:xfrm>
-            <a:off x="3884613" y="8685213"/>
-            <a:ext cx="2971800" cy="458787"/>
-          </a:xfrm>
-          <a:prstGeom prst="rect">
-            <a:avLst/>
-          </a:prstGeom>
-        </p:spPr>
-        <p:txBody>
-          <a:bodyPr vert="horz" lIns="91440" tIns="45720" rIns="91440" bIns="45720" rtlCol="0" anchor="b"/>
-          <a:lstStyle>
-            <a:lvl1pPr algn="r">
-              <a:defRPr sz="1200"/>
-            </a:lvl1pPr>
-          </a:lstStyle>
-          <a:p>
-            <a:fld id="{CE5E9CC1-C706-0F49-92D6-E571CC5EEA8F}" type="slidenum">
-              <a:rPr lang="en-US"/>
-              <a:t>‹#›</a:t>
-            </a:fld>
-            <a:endParaRPr lang="en-US"/>
-          </a:p>
-        </p:txBody>
-      </p:sp>
     </p:spTree>
     <p:extLst>
       <p:ext uri="{BB962C8B-B14F-4D97-AF65-F5344CB8AC3E}">
-        <p14:creationId xmlns:p14="http://schemas.microsoft.com/office/powerpoint/2010/main" val="1024086991"/>
+        <p14:creationId xmlns:p14="http://schemas.microsoft.com/office/powerpoint/2010/main" val="1770172914"/>
       </p:ext>
     </p:extLst>
   </p:cSld>
@@ -524,7 +305,6 @@
               <a:rPr lang="en-US" dirty="0"/>
               <a:t>0:00–0:02. Connect directly to previous lecture: downsampling risks aliasing; upsampling produces images. Both need filtering.</a:t>
             </a:r>
-            <a:endParaRPr lang="en-US" dirty="0"/>
           </a:p>
         </p:txBody>
       </p:sp>
@@ -612,7 +392,6 @@
               <a:rPr lang="en-US" dirty="0"/>
               <a:t>Connect to reconstruction from Week 2: the mathematics is analogous, but this time both the input and output are discrete-time sequences.</a:t>
             </a:r>
-            <a:endParaRPr lang="en-US" dirty="0"/>
           </a:p>
         </p:txBody>
       </p:sp>
@@ -700,7 +479,6 @@
               <a:rPr lang="en-US" dirty="0"/>
               <a:t>This slide can be fast if students already understand FIR design. Focus on the three checks: cutoff, gain, delay.</a:t>
             </a:r>
-            <a:endParaRPr lang="en-US" dirty="0"/>
           </a:p>
         </p:txBody>
       </p:sp>
@@ -784,10 +562,6 @@
           <a:bodyPr/>
           <a:lstStyle/>
           <a:p>
-            <a:r>
-              <a:rPr lang="en-US" dirty="0"/>
-              <a:t/>
-            </a:r>
             <a:endParaRPr lang="en-US" dirty="0"/>
           </a:p>
         </p:txBody>
@@ -876,7 +650,6 @@
               <a:rPr lang="en-US" dirty="0"/>
               <a:t>Example: 48 kHz to 44.1 kHz = 147/160. We conceptually create a 7.056 MHz intermediate grid, but efficient polyphase implementations never form all those zeros explicitly.</a:t>
             </a:r>
-            <a:endParaRPr lang="en-US" dirty="0"/>
           </a:p>
         </p:txBody>
       </p:sp>
@@ -964,7 +737,6 @@
               <a:rPr lang="en-US" dirty="0"/>
               <a:t>Clarify that this normalized cutoff is expressed on the high-rate intermediate grid. Students often mix the input-rate and intermediate-rate normalized frequencies.</a:t>
             </a:r>
-            <a:endParaRPr lang="en-US" dirty="0"/>
           </a:p>
         </p:txBody>
       </p:sp>
@@ -1052,7 +824,6 @@
               <a:rPr lang="en-US" dirty="0"/>
               <a:t>Use scipy.signal.resample_poly as the practical demo. Do not derive polyphase in detail if it is reserved for a later week.</a:t>
             </a:r>
-            <a:endParaRPr lang="en-US" dirty="0"/>
           </a:p>
         </p:txBody>
       </p:sp>
@@ -1136,10 +907,6 @@
           <a:bodyPr/>
           <a:lstStyle/>
           <a:p>
-            <a:r>
-              <a:rPr lang="en-US" dirty="0"/>
-              <a:t/>
-            </a:r>
             <a:endParaRPr lang="en-US" dirty="0"/>
           </a:p>
         </p:txBody>
@@ -1228,7 +995,6 @@
               <a:rPr lang="en-US" dirty="0"/>
               <a:t>Use “transposed” rather than “deconvolution”; it is the transpose of the linear operator, not an inverse convolution in general.</a:t>
             </a:r>
-            <a:endParaRPr lang="en-US" dirty="0"/>
           </a:p>
         </p:txBody>
       </p:sp>
@@ -1316,7 +1082,6 @@
               <a:rPr lang="en-US" dirty="0"/>
               <a:t>In 2-D images this appears as checkerboard texture; in 1-D audio it can appear as periodic or tonal artifacts. Avoid claiming anti-imaging initialization alone always solves it.</a:t>
             </a:r>
-            <a:endParaRPr lang="en-US" dirty="0"/>
           </a:p>
         </p:txBody>
       </p:sp>
@@ -1404,7 +1169,6 @@
               <a:rPr lang="en-US" dirty="0"/>
               <a:t>Present this as an engineering prior, not a universal guarantee. The notebook includes a direct zero-insert + conv equivalence demo.</a:t>
             </a:r>
-            <a:endParaRPr lang="en-US" dirty="0"/>
           </a:p>
         </p:txBody>
       </p:sp>
@@ -1492,7 +1256,6 @@
               <a:rPr lang="en-US" dirty="0"/>
               <a:t>Preview the amplitude-scaling issue: zero insertion does not change old sample values, but the interpolation filter needs DC gain L to preserve amplitudes after smoothing.</a:t>
             </a:r>
-            <a:endParaRPr lang="en-US" dirty="0"/>
           </a:p>
         </p:txBody>
       </p:sp>
@@ -1580,7 +1343,6 @@
               <a:rPr lang="en-US" dirty="0"/>
               <a:t>Good exit answer: after zero insertion only 1/L of the high-rate samples contain the original amplitude, so a unity-gain smoother would reduce a constant signal by L; DC gain L restores it.</a:t>
             </a:r>
-            <a:endParaRPr lang="en-US" dirty="0"/>
           </a:p>
         </p:txBody>
       </p:sp>
@@ -1664,10 +1426,6 @@
           <a:bodyPr/>
           <a:lstStyle/>
           <a:p>
-            <a:r>
-              <a:rPr lang="en-US" dirty="0"/>
-              <a:t/>
-            </a:r>
             <a:endParaRPr lang="en-US" dirty="0"/>
           </a:p>
         </p:txBody>
@@ -1752,10 +1510,6 @@
           <a:bodyPr/>
           <a:lstStyle/>
           <a:p>
-            <a:r>
-              <a:rPr lang="en-US" dirty="0"/>
-              <a:t/>
-            </a:r>
             <a:endParaRPr lang="en-US" dirty="0"/>
           </a:p>
         </p:txBody>
@@ -1844,7 +1598,6 @@
               <a:rPr lang="en-US" dirty="0"/>
               <a:t>Use the phrase “zero stuffing” once, then emphasize that upsampling alone is not interpolation.</a:t>
             </a:r>
-            <a:endParaRPr lang="en-US" dirty="0"/>
           </a:p>
         </p:txBody>
       </p:sp>
@@ -1932,7 +1685,6 @@
               <a:rPr lang="en-US" dirty="0"/>
               <a:t>Ask: why do images appear even though the inserted samples are zeros? Answer: changing the sampling lattice changes how the periodic DTFT maps into the new normalized frequency variable.</a:t>
             </a:r>
-            <a:endParaRPr lang="en-US" dirty="0"/>
           </a:p>
         </p:txBody>
       </p:sp>
@@ -2020,7 +1772,6 @@
               <a:rPr lang="en-US" dirty="0"/>
               <a:t>Suggested answer: Three copies. The argument X(e^{j3ω}) traverses three periods as ω spans one 2π interval.</a:t>
             </a:r>
-            <a:endParaRPr lang="en-US" dirty="0"/>
           </a:p>
         </p:txBody>
       </p:sp>
@@ -2104,10 +1855,6 @@
           <a:bodyPr/>
           <a:lstStyle/>
           <a:p>
-            <a:r>
-              <a:rPr lang="en-US" dirty="0"/>
-              <a:t/>
-            </a:r>
             <a:endParaRPr lang="en-US" dirty="0"/>
           </a:p>
         </p:txBody>
@@ -2196,7 +1943,6 @@
               <a:rPr lang="en-US" dirty="0"/>
               <a:t>This is the point where many students forget the gain of L. Tie it to a constant input x[n]=1: after zero insertion only 1 in L samples is nonzero, so averaging without gain would reduce the level.</a:t>
             </a:r>
-            <a:endParaRPr lang="en-US" dirty="0"/>
           </a:p>
         </p:txBody>
       </p:sp>
@@ -2284,7 +2030,6 @@
               <a:rPr lang="en-US" dirty="0"/>
               <a:t>This constant-signal argument is more intuitive than a formal derivation. It gives students a reliable check when coding.</a:t>
             </a:r>
-            <a:endParaRPr lang="en-US" dirty="0"/>
           </a:p>
         </p:txBody>
       </p:sp>
@@ -2362,6 +2107,7 @@
         <a:solidFill>
           <a:srgbClr val="FFFFFF"/>
         </a:solidFill>
+        <a:effectLst/>
       </p:bgPr>
     </p:bg>
     <p:spTree>
@@ -2424,7 +2170,7 @@
           <a:bodyPr wrap="square" lIns="0" tIns="0" rIns="0" bIns="0" rtlCol="0" anchor="ctr"/>
           <a:lstStyle/>
           <a:p>
-            <a:pPr indent="0" marL="0">
+            <a:pPr marL="0" indent="0">
               <a:buNone/>
             </a:pPr>
             <a:r>
@@ -2463,7 +2209,7 @@
           <a:bodyPr wrap="square" lIns="0" tIns="0" rIns="0" bIns="0" rtlCol="0" anchor="ctr"/>
           <a:lstStyle/>
           <a:p>
-            <a:pPr algn="r" indent="0" marL="0">
+            <a:pPr marL="0" indent="0" algn="r">
               <a:buNone/>
             </a:pPr>
             <a:r>
@@ -2501,7 +2247,7 @@
           </a:prstGeom>
           <a:extLst>
             <a:ext uri="{C572A759-6A51-4108-AA02-DFA0A04FC94B}">
-              <ma14:wrappingTextBoxFlag xmlns:ma14="http://schemas.microsoft.com/office/mac/drawingml/2011/main" val="0"/>
+              <ma14:wrappingTextBoxFlag xmlns:ma14="http://schemas.microsoft.com/office/mac/drawingml/2011/main" xmlns="" val="0"/>
             </a:ext>
           </a:extLst>
         </p:spPr>
@@ -2522,8 +2268,8 @@
           <a:p>
             <a:pPr algn="r"/>
             <a:fld id="{F7021451-1387-4CA6-816F-3879F97B5CBC}" type="slidenum">
-              <a:rPr b="0" lang="en-US"/>
-              <a:t>1002</a:t>
+              <a:rPr lang="en-US" b="0"/>
+              <a:t>‹#›</a:t>
             </a:fld>
             <a:endParaRPr lang="en-US"/>
           </a:p>
@@ -2540,6 +2286,11 @@
 <file path=ppt/slideMasters/slideMaster1.xml><?xml version="1.0" encoding="utf-8"?>
 <p:sldMaster xmlns:a="http://schemas.openxmlformats.org/drawingml/2006/main" xmlns:r="http://schemas.openxmlformats.org/officeDocument/2006/relationships" xmlns:p="http://schemas.openxmlformats.org/presentationml/2006/main">
   <p:cSld>
+    <p:bg>
+      <p:bgRef idx="1001">
+        <a:schemeClr val="bg1"/>
+      </p:bgRef>
+    </p:bg>
     <p:spTree>
       <p:nvGrpSpPr>
         <p:cNvPr id="1" name=""/>
@@ -2574,7 +2325,7 @@
           </a:prstGeom>
           <a:extLst>
             <a:ext uri="{C572A759-6A51-4108-AA02-DFA0A04FC94B}">
-              <ma14:wrappingTextBoxFlag xmlns:ma14="http://schemas.microsoft.com/office/mac/drawingml/2011/main" val="0"/>
+              <ma14:wrappingTextBoxFlag xmlns:ma14="http://schemas.microsoft.com/office/mac/drawingml/2011/main" xmlns="" val="0"/>
             </a:ext>
           </a:extLst>
         </p:spPr>
@@ -2595,8 +2346,8 @@
           <a:p>
             <a:pPr algn="r"/>
             <a:fld id="{F7021451-1387-4CA6-816F-3879F97B5CBC}" type="slidenum">
-              <a:rPr b="0" lang="en-US"/>
-              <a:t>null</a:t>
+              <a:rPr lang="en-US" b="0"/>
+              <a:t>‹#›</a:t>
             </a:fld>
             <a:endParaRPr lang="en-US"/>
           </a:p>
@@ -2871,6 +2622,7 @@
         <a:solidFill>
           <a:srgbClr val="16324F"/>
         </a:solidFill>
+        <a:effectLst/>
       </p:bgPr>
     </p:bg>
     <p:spTree>
@@ -2911,6 +2663,13 @@
             <a:prstDash val="solid"/>
           </a:ln>
         </p:spPr>
+        <p:txBody>
+          <a:bodyPr/>
+          <a:lstStyle/>
+          <a:p>
+            <a:endParaRPr lang="en-US"/>
+          </a:p>
+        </p:txBody>
       </p:sp>
       <p:sp>
         <p:nvSpPr>
@@ -2936,6 +2695,13 @@
             <a:prstDash val="solid"/>
           </a:ln>
         </p:spPr>
+        <p:txBody>
+          <a:bodyPr/>
+          <a:lstStyle/>
+          <a:p>
+            <a:endParaRPr lang="en-US"/>
+          </a:p>
+        </p:txBody>
       </p:sp>
       <p:sp>
         <p:nvSpPr>
@@ -2958,7 +2724,7 @@
           <a:bodyPr wrap="square" lIns="0" tIns="0" rIns="0" bIns="0" rtlCol="0" anchor="ctr"/>
           <a:lstStyle/>
           <a:p>
-            <a:pPr indent="0" marL="0">
+            <a:pPr marL="0" indent="0">
               <a:buNone/>
             </a:pPr>
             <a:r>
@@ -2970,7 +2736,7 @@
                 <a:ea typeface="Aptos" pitchFamily="34" charset="-122"/>
                 <a:cs typeface="Aptos" pitchFamily="34" charset="-120"/>
               </a:rPr>
-              <a:t>LECTURE 12</a:t>
+              <a:t>WEEK 6 ● LECTURE 12</a:t>
             </a:r>
             <a:endParaRPr lang="en-US" sz="1400" dirty="0"/>
           </a:p>
@@ -2999,7 +2765,7 @@
           </a:bodyPr>
           <a:lstStyle/>
           <a:p>
-            <a:pPr indent="0" marL="0">
+            <a:pPr marL="0" indent="0">
               <a:buNone/>
             </a:pPr>
             <a:r>
@@ -3016,7 +2782,7 @@
             <a:endParaRPr lang="en-US" sz="3300" dirty="0"/>
           </a:p>
           <a:p>
-            <a:pPr indent="0" marL="0">
+            <a:pPr marL="0" indent="0">
               <a:buNone/>
             </a:pPr>
             <a:r>
@@ -3033,7 +2799,7 @@
             <a:endParaRPr lang="en-US" sz="3300" dirty="0"/>
           </a:p>
           <a:p>
-            <a:pPr indent="0" marL="0">
+            <a:pPr marL="0" indent="0">
               <a:buNone/>
             </a:pPr>
             <a:r>
@@ -3074,7 +2840,7 @@
           </a:bodyPr>
           <a:lstStyle/>
           <a:p>
-            <a:pPr indent="0" marL="0">
+            <a:pPr marL="0" indent="0">
               <a:buNone/>
             </a:pPr>
             <a:r>
@@ -3116,6 +2882,13 @@
             <a:prstDash val="solid"/>
           </a:ln>
         </p:spPr>
+        <p:txBody>
+          <a:bodyPr/>
+          <a:lstStyle/>
+          <a:p>
+            <a:endParaRPr lang="en-US"/>
+          </a:p>
+        </p:txBody>
       </p:sp>
       <p:sp>
         <p:nvSpPr>
@@ -3140,7 +2913,7 @@
           </a:bodyPr>
           <a:lstStyle/>
           <a:p>
-            <a:pPr algn="ctr" indent="0" marL="0">
+            <a:pPr marL="0" indent="0" algn="ctr">
               <a:buNone/>
             </a:pPr>
             <a:r>
@@ -3179,7 +2952,7 @@
           <a:bodyPr wrap="square" lIns="0" tIns="0" rIns="0" bIns="0" rtlCol="0" anchor="ctr"/>
           <a:lstStyle/>
           <a:p>
-            <a:pPr algn="ctr" indent="0" marL="0">
+            <a:pPr marL="0" indent="0" algn="ctr">
               <a:buNone/>
             </a:pPr>
             <a:r>
@@ -3221,6 +2994,13 @@
             <a:prstDash val="solid"/>
           </a:ln>
         </p:spPr>
+        <p:txBody>
+          <a:bodyPr/>
+          <a:lstStyle/>
+          <a:p>
+            <a:endParaRPr lang="en-US"/>
+          </a:p>
+        </p:txBody>
       </p:sp>
       <p:sp>
         <p:nvSpPr>
@@ -3245,7 +3025,7 @@
           </a:bodyPr>
           <a:lstStyle/>
           <a:p>
-            <a:pPr algn="ctr" indent="0" marL="0">
+            <a:pPr marL="0" indent="0" algn="ctr">
               <a:buNone/>
             </a:pPr>
             <a:r>
@@ -3287,6 +3067,13 @@
             <a:prstDash val="solid"/>
           </a:ln>
         </p:spPr>
+        <p:txBody>
+          <a:bodyPr/>
+          <a:lstStyle/>
+          <a:p>
+            <a:endParaRPr lang="en-US"/>
+          </a:p>
+        </p:txBody>
       </p:sp>
       <p:sp>
         <p:nvSpPr>
@@ -3311,7 +3098,7 @@
           </a:bodyPr>
           <a:lstStyle/>
           <a:p>
-            <a:pPr algn="ctr" indent="0" marL="0">
+            <a:pPr marL="0" indent="0" algn="ctr">
               <a:buNone/>
             </a:pPr>
             <a:r>
@@ -3350,7 +3137,7 @@
           <a:bodyPr wrap="square" lIns="0" tIns="0" rIns="0" bIns="0" rtlCol="0" anchor="ctr"/>
           <a:lstStyle/>
           <a:p>
-            <a:pPr indent="0" marL="0">
+            <a:pPr marL="0" indent="0">
               <a:buNone/>
             </a:pPr>
             <a:r>
@@ -3414,7 +3201,7 @@
           <a:bodyPr wrap="square" lIns="0" tIns="0" rIns="0" bIns="0" rtlCol="0" anchor="ctr"/>
           <a:lstStyle/>
           <a:p>
-            <a:pPr indent="0" marL="0">
+            <a:pPr marL="0" indent="0">
               <a:buNone/>
             </a:pPr>
             <a:r>
@@ -3455,7 +3242,7 @@
           </a:bodyPr>
           <a:lstStyle/>
           <a:p>
-            <a:pPr indent="0" marL="0">
+            <a:pPr marL="0" indent="0">
               <a:buNone/>
             </a:pPr>
             <a:r>
@@ -3475,14 +3262,14 @@
       </p:sp>
       <p:pic>
         <p:nvPicPr>
-          <p:cNvPr id="4" name="Image 0" descr="/mnt/data/week6_multirate/assets/interpolation_waveform.png">    </p:cNvPr>
+          <p:cNvPr id="4" name="Image 0" descr="/mnt/data/week6_multirate/assets/interpolation_waveform.png"/>
           <p:cNvPicPr>
             <a:picLocks noChangeAspect="1"/>
           </p:cNvPicPr>
           <p:nvPr/>
         </p:nvPicPr>
         <p:blipFill>
-          <a:blip r:embed="rId1"/>
+          <a:blip r:embed="rId3"/>
           <a:stretch>
             <a:fillRect/>
           </a:stretch>
@@ -3520,7 +3307,7 @@
           </a:bodyPr>
           <a:lstStyle/>
           <a:p>
-            <a:pPr indent="0" marL="0">
+            <a:pPr marL="0" indent="0">
               <a:buNone/>
             </a:pPr>
             <a:r>
@@ -3534,9 +3321,6 @@
               </a:rPr>
               <a:t>• </a:t>
             </a:r>
-            <a:pPr indent="0" marL="0">
-              <a:buNone/>
-            </a:pPr>
             <a:r>
               <a:rPr lang="en-US" sz="1690" dirty="0">
                 <a:solidFill>
@@ -3546,11 +3330,20 @@
                 <a:ea typeface="Aptos" pitchFamily="34" charset="-122"/>
                 <a:cs typeface="Aptos" pitchFamily="34" charset="-120"/>
               </a:rPr>
-              <a:t>Inserted zeros disappear after filtering.</a:t>
-            </a:r>
-            <a:pPr indent="0" marL="0">
-              <a:buNone/>
-            </a:pPr>
+              <a:t>Inserted zeros disappear after filtering.
+</a:t>
+            </a:r>
+            <a:r>
+              <a:rPr lang="en-US" sz="1690" b="1" dirty="0">
+                <a:solidFill>
+                  <a:srgbClr val="2F80A6"/>
+                </a:solidFill>
+                <a:latin typeface="Aptos" pitchFamily="34" charset="0"/>
+                <a:ea typeface="Aptos" pitchFamily="34" charset="-122"/>
+                <a:cs typeface="Aptos" pitchFamily="34" charset="-120"/>
+              </a:rPr>
+              <a:t>• </a:t>
+            </a:r>
             <a:r>
               <a:rPr lang="en-US" sz="1690" dirty="0">
                 <a:solidFill>
@@ -3560,12 +3353,9 @@
                 <a:ea typeface="Aptos" pitchFamily="34" charset="-122"/>
                 <a:cs typeface="Aptos" pitchFamily="34" charset="-120"/>
               </a:rPr>
-              <a:t>
+              <a:t>Original sample locations are retained (subject to filter delay / edge effects).
 </a:t>
             </a:r>
-            <a:pPr indent="0" marL="0">
-              <a:buNone/>
-            </a:pPr>
             <a:r>
               <a:rPr lang="en-US" sz="1690" b="1" dirty="0">
                 <a:solidFill>
@@ -3577,9 +3367,6 @@
               </a:rPr>
               <a:t>• </a:t>
             </a:r>
-            <a:pPr indent="0" marL="0">
-              <a:buNone/>
-            </a:pPr>
             <a:r>
               <a:rPr lang="en-US" sz="1690" dirty="0">
                 <a:solidFill>
@@ -3589,26 +3376,9 @@
                 <a:ea typeface="Aptos" pitchFamily="34" charset="-122"/>
                 <a:cs typeface="Aptos" pitchFamily="34" charset="-120"/>
               </a:rPr>
-              <a:t>Original sample locations are retained (subject to filter delay / edge effects).</a:t>
-            </a:r>
-            <a:pPr indent="0" marL="0">
-              <a:buNone/>
-            </a:pPr>
-            <a:r>
-              <a:rPr lang="en-US" sz="1690" dirty="0">
-                <a:solidFill>
-                  <a:srgbClr val="1E293B"/>
-                </a:solidFill>
-                <a:latin typeface="Aptos" pitchFamily="34" charset="0"/>
-                <a:ea typeface="Aptos" pitchFamily="34" charset="-122"/>
-                <a:cs typeface="Aptos" pitchFamily="34" charset="-120"/>
-              </a:rPr>
-              <a:t>
+              <a:t>Intermediate samples are weighted combinations of neighboring originals.
 </a:t>
             </a:r>
-            <a:pPr indent="0" marL="0">
-              <a:buNone/>
-            </a:pPr>
             <a:r>
               <a:rPr lang="en-US" sz="1690" b="1" dirty="0">
                 <a:solidFill>
@@ -3620,52 +3390,6 @@
               </a:rPr>
               <a:t>• </a:t>
             </a:r>
-            <a:pPr indent="0" marL="0">
-              <a:buNone/>
-            </a:pPr>
-            <a:r>
-              <a:rPr lang="en-US" sz="1690" dirty="0">
-                <a:solidFill>
-                  <a:srgbClr val="1E293B"/>
-                </a:solidFill>
-                <a:latin typeface="Aptos" pitchFamily="34" charset="0"/>
-                <a:ea typeface="Aptos" pitchFamily="34" charset="-122"/>
-                <a:cs typeface="Aptos" pitchFamily="34" charset="-120"/>
-              </a:rPr>
-              <a:t>Intermediate samples are weighted combinations of neighboring originals.</a:t>
-            </a:r>
-            <a:pPr indent="0" marL="0">
-              <a:buNone/>
-            </a:pPr>
-            <a:r>
-              <a:rPr lang="en-US" sz="1690" dirty="0">
-                <a:solidFill>
-                  <a:srgbClr val="1E293B"/>
-                </a:solidFill>
-                <a:latin typeface="Aptos" pitchFamily="34" charset="0"/>
-                <a:ea typeface="Aptos" pitchFamily="34" charset="-122"/>
-                <a:cs typeface="Aptos" pitchFamily="34" charset="-120"/>
-              </a:rPr>
-              <a:t>
-</a:t>
-            </a:r>
-            <a:pPr indent="0" marL="0">
-              <a:buNone/>
-            </a:pPr>
-            <a:r>
-              <a:rPr lang="en-US" sz="1690" b="1" dirty="0">
-                <a:solidFill>
-                  <a:srgbClr val="2F80A6"/>
-                </a:solidFill>
-                <a:latin typeface="Aptos" pitchFamily="34" charset="0"/>
-                <a:ea typeface="Aptos" pitchFamily="34" charset="-122"/>
-                <a:cs typeface="Aptos" pitchFamily="34" charset="-120"/>
-              </a:rPr>
-              <a:t>• </a:t>
-            </a:r>
-            <a:pPr indent="0" marL="0">
-              <a:buNone/>
-            </a:pPr>
             <a:r>
               <a:rPr lang="en-US" sz="1690" dirty="0">
                 <a:solidFill>
@@ -3707,13 +3431,20 @@
             <a:prstDash val="solid"/>
           </a:ln>
           <a:effectLst>
-            <a:outerShdw sx="100000" sy="100000" kx="0" ky="0" algn="bl" rotWithShape="0" blurRad="16510" dist="8890" dir="2700000">
+            <a:outerShdw blurRad="16510" dist="8890" dir="2700000" algn="bl" rotWithShape="0">
               <a:srgbClr val="000000">
                 <a:alpha val="12000"/>
               </a:srgbClr>
             </a:outerShdw>
           </a:effectLst>
         </p:spPr>
+        <p:txBody>
+          <a:bodyPr/>
+          <a:lstStyle/>
+          <a:p>
+            <a:endParaRPr lang="en-US"/>
+          </a:p>
+        </p:txBody>
       </p:sp>
       <p:sp>
         <p:nvSpPr>
@@ -3736,7 +3467,7 @@
           <a:bodyPr wrap="square" lIns="0" tIns="0" rIns="0" bIns="0" rtlCol="0" anchor="ctr"/>
           <a:lstStyle/>
           <a:p>
-            <a:pPr indent="0" marL="0">
+            <a:pPr marL="0" indent="0">
               <a:buNone/>
             </a:pPr>
             <a:r>
@@ -3773,11 +3504,11 @@
         </p:spPr>
         <p:txBody>
           <a:bodyPr wrap="square" lIns="0" tIns="0" rIns="0" bIns="0" rtlCol="0" anchor="ctr">
-            <a:normAutofit/>
+            <a:normAutofit fontScale="62500" lnSpcReduction="20000"/>
           </a:bodyPr>
           <a:lstStyle/>
           <a:p>
-            <a:pPr indent="0" marL="0">
+            <a:pPr marL="0" indent="0">
               <a:buNone/>
             </a:pPr>
             <a:r>
@@ -3815,7 +3546,7 @@
           </a:prstGeom>
           <a:extLst>
             <a:ext uri="{C572A759-6A51-4108-AA02-DFA0A04FC94B}">
-              <ma14:wrappingTextBoxFlag xmlns:ma14="http://schemas.microsoft.com/office/mac/drawingml/2011/main" val="0"/>
+              <ma14:wrappingTextBoxFlag xmlns:ma14="http://schemas.microsoft.com/office/mac/drawingml/2011/main" xmlns="" val="0"/>
             </a:ext>
           </a:extLst>
         </p:spPr>
@@ -3836,7 +3567,7 @@
           <a:p>
             <a:pPr algn="r"/>
             <a:fld id="{F7021451-1387-4CA6-816F-3879F97B5CBC}" type="slidenum">
-              <a:rPr b="0" lang="en-US"/>
+              <a:rPr lang="en-US" b="0"/>
               <a:t>10</a:t>
             </a:fld>
             <a:endParaRPr lang="en-US"/>
@@ -3889,7 +3620,7 @@
           <a:bodyPr wrap="square" lIns="0" tIns="0" rIns="0" bIns="0" rtlCol="0" anchor="ctr"/>
           <a:lstStyle/>
           <a:p>
-            <a:pPr indent="0" marL="0">
+            <a:pPr marL="0" indent="0">
               <a:buNone/>
             </a:pPr>
             <a:r>
@@ -3930,7 +3661,7 @@
           </a:bodyPr>
           <a:lstStyle/>
           <a:p>
-            <a:pPr indent="0" marL="0">
+            <a:pPr marL="0" indent="0">
               <a:buNone/>
             </a:pPr>
             <a:r>
@@ -3974,13 +3705,20 @@
             <a:prstDash val="solid"/>
           </a:ln>
           <a:effectLst>
-            <a:outerShdw sx="100000" sy="100000" kx="0" ky="0" algn="bl" rotWithShape="0" blurRad="16510" dist="8890" dir="2700000">
+            <a:outerShdw blurRad="16510" dist="8890" dir="2700000" algn="bl" rotWithShape="0">
               <a:srgbClr val="000000">
                 <a:alpha val="12000"/>
               </a:srgbClr>
             </a:outerShdw>
           </a:effectLst>
         </p:spPr>
+        <p:txBody>
+          <a:bodyPr/>
+          <a:lstStyle/>
+          <a:p>
+            <a:endParaRPr lang="en-US"/>
+          </a:p>
+        </p:txBody>
       </p:sp>
       <p:sp>
         <p:nvSpPr>
@@ -4003,7 +3741,7 @@
           <a:bodyPr wrap="square" lIns="0" tIns="0" rIns="0" bIns="0" rtlCol="0" anchor="ctr"/>
           <a:lstStyle/>
           <a:p>
-            <a:pPr indent="0" marL="0">
+            <a:pPr marL="0" indent="0">
               <a:buNone/>
             </a:pPr>
             <a:r>
@@ -4044,7 +3782,7 @@
           </a:bodyPr>
           <a:lstStyle/>
           <a:p>
-            <a:pPr indent="0" marL="0">
+            <a:pPr marL="0" indent="0">
               <a:buNone/>
             </a:pPr>
             <a:r>
@@ -4088,13 +3826,20 @@
             <a:prstDash val="solid"/>
           </a:ln>
           <a:effectLst>
-            <a:outerShdw sx="100000" sy="100000" kx="0" ky="0" algn="bl" rotWithShape="0" blurRad="16510" dist="8890" dir="2700000">
+            <a:outerShdw blurRad="16510" dist="8890" dir="2700000" algn="bl" rotWithShape="0">
               <a:srgbClr val="000000">
                 <a:alpha val="12000"/>
               </a:srgbClr>
             </a:outerShdw>
           </a:effectLst>
         </p:spPr>
+        <p:txBody>
+          <a:bodyPr/>
+          <a:lstStyle/>
+          <a:p>
+            <a:endParaRPr lang="en-US"/>
+          </a:p>
+        </p:txBody>
       </p:sp>
       <p:sp>
         <p:nvSpPr>
@@ -4117,7 +3862,7 @@
           <a:bodyPr wrap="square" lIns="0" tIns="0" rIns="0" bIns="0" rtlCol="0" anchor="ctr"/>
           <a:lstStyle/>
           <a:p>
-            <a:pPr indent="0" marL="0">
+            <a:pPr marL="0" indent="0">
               <a:buNone/>
             </a:pPr>
             <a:r>
@@ -4158,7 +3903,7 @@
           </a:bodyPr>
           <a:lstStyle/>
           <a:p>
-            <a:pPr indent="0" marL="0">
+            <a:pPr marL="0" indent="0">
               <a:buNone/>
             </a:pPr>
             <a:r>
@@ -4202,13 +3947,20 @@
             <a:prstDash val="solid"/>
           </a:ln>
           <a:effectLst>
-            <a:outerShdw sx="100000" sy="100000" kx="0" ky="0" algn="bl" rotWithShape="0" blurRad="16510" dist="8890" dir="2700000">
+            <a:outerShdw blurRad="16510" dist="8890" dir="2700000" algn="bl" rotWithShape="0">
               <a:srgbClr val="000000">
                 <a:alpha val="12000"/>
               </a:srgbClr>
             </a:outerShdw>
           </a:effectLst>
         </p:spPr>
+        <p:txBody>
+          <a:bodyPr/>
+          <a:lstStyle/>
+          <a:p>
+            <a:endParaRPr lang="en-US"/>
+          </a:p>
+        </p:txBody>
       </p:sp>
       <p:sp>
         <p:nvSpPr>
@@ -4231,7 +3983,7 @@
           <a:bodyPr wrap="square" lIns="0" tIns="0" rIns="0" bIns="0" rtlCol="0" anchor="ctr"/>
           <a:lstStyle/>
           <a:p>
-            <a:pPr indent="0" marL="0">
+            <a:pPr marL="0" indent="0">
               <a:buNone/>
             </a:pPr>
             <a:r>
@@ -4272,7 +4024,7 @@
           </a:bodyPr>
           <a:lstStyle/>
           <a:p>
-            <a:pPr indent="0" marL="0">
+            <a:pPr marL="0" indent="0">
               <a:buNone/>
             </a:pPr>
             <a:r>
@@ -4316,13 +4068,20 @@
             <a:prstDash val="solid"/>
           </a:ln>
           <a:effectLst>
-            <a:outerShdw sx="100000" sy="100000" kx="0" ky="0" algn="bl" rotWithShape="0" blurRad="16510" dist="8890" dir="2700000">
+            <a:outerShdw blurRad="16510" dist="8890" dir="2700000" algn="bl" rotWithShape="0">
               <a:srgbClr val="000000">
                 <a:alpha val="12000"/>
               </a:srgbClr>
             </a:outerShdw>
           </a:effectLst>
         </p:spPr>
+        <p:txBody>
+          <a:bodyPr/>
+          <a:lstStyle/>
+          <a:p>
+            <a:endParaRPr lang="en-US"/>
+          </a:p>
+        </p:txBody>
       </p:sp>
       <p:sp>
         <p:nvSpPr>
@@ -4345,7 +4104,7 @@
           <a:bodyPr wrap="square" lIns="0" tIns="0" rIns="0" bIns="0" rtlCol="0" anchor="ctr"/>
           <a:lstStyle/>
           <a:p>
-            <a:pPr indent="0" marL="0">
+            <a:pPr marL="0" indent="0">
               <a:buNone/>
             </a:pPr>
             <a:r>
@@ -4386,7 +4145,7 @@
           </a:bodyPr>
           <a:lstStyle/>
           <a:p>
-            <a:pPr indent="0" marL="0">
+            <a:pPr marL="0" indent="0">
               <a:buNone/>
             </a:pPr>
             <a:r>
@@ -4425,7 +4184,7 @@
           <a:bodyPr wrap="square" lIns="0" tIns="0" rIns="0" bIns="0" rtlCol="0" anchor="ctr"/>
           <a:lstStyle/>
           <a:p>
-            <a:pPr algn="ctr" indent="0" marL="0">
+            <a:pPr marL="0" indent="0" algn="ctr">
               <a:buNone/>
             </a:pPr>
             <a:r>
@@ -4463,7 +4222,7 @@
           </a:prstGeom>
           <a:extLst>
             <a:ext uri="{C572A759-6A51-4108-AA02-DFA0A04FC94B}">
-              <ma14:wrappingTextBoxFlag xmlns:ma14="http://schemas.microsoft.com/office/mac/drawingml/2011/main" val="0"/>
+              <ma14:wrappingTextBoxFlag xmlns:ma14="http://schemas.microsoft.com/office/mac/drawingml/2011/main" xmlns="" val="0"/>
             </a:ext>
           </a:extLst>
         </p:spPr>
@@ -4484,7 +4243,7 @@
           <a:p>
             <a:pPr algn="r"/>
             <a:fld id="{F7021451-1387-4CA6-816F-3879F97B5CBC}" type="slidenum">
-              <a:rPr b="0" lang="en-US"/>
+              <a:rPr lang="en-US" b="0"/>
               <a:t>11</a:t>
             </a:fld>
             <a:endParaRPr lang="en-US"/>
@@ -4507,6 +4266,7 @@
         <a:solidFill>
           <a:srgbClr val="16324F"/>
         </a:solidFill>
+        <a:effectLst/>
       </p:bgPr>
     </p:bg>
     <p:spTree>
@@ -4544,7 +4304,7 @@
           <a:bodyPr wrap="square" lIns="0" tIns="0" rIns="0" bIns="0" rtlCol="0" anchor="ctr"/>
           <a:lstStyle/>
           <a:p>
-            <a:pPr indent="0" marL="0">
+            <a:pPr marL="0" indent="0">
               <a:buNone/>
             </a:pPr>
             <a:r>
@@ -4585,7 +4345,7 @@
           </a:bodyPr>
           <a:lstStyle/>
           <a:p>
-            <a:pPr indent="0" marL="0">
+            <a:pPr marL="0" indent="0">
               <a:buNone/>
             </a:pPr>
             <a:r>
@@ -4626,7 +4386,7 @@
           </a:bodyPr>
           <a:lstStyle/>
           <a:p>
-            <a:pPr indent="0" marL="0">
+            <a:pPr marL="0" indent="0">
               <a:buNone/>
             </a:pPr>
             <a:r>
@@ -4690,7 +4450,7 @@
           <a:bodyPr wrap="square" lIns="0" tIns="0" rIns="0" bIns="0" rtlCol="0" anchor="ctr"/>
           <a:lstStyle/>
           <a:p>
-            <a:pPr indent="0" marL="0">
+            <a:pPr marL="0" indent="0">
               <a:buNone/>
             </a:pPr>
             <a:r>
@@ -4731,7 +4491,7 @@
           </a:bodyPr>
           <a:lstStyle/>
           <a:p>
-            <a:pPr indent="0" marL="0">
+            <a:pPr marL="0" indent="0">
               <a:buNone/>
             </a:pPr>
             <a:r>
@@ -4773,6 +4533,13 @@
             <a:prstDash val="solid"/>
           </a:ln>
         </p:spPr>
+        <p:txBody>
+          <a:bodyPr/>
+          <a:lstStyle/>
+          <a:p>
+            <a:endParaRPr lang="en-US"/>
+          </a:p>
+        </p:txBody>
       </p:sp>
       <p:sp>
         <p:nvSpPr>
@@ -4797,7 +4564,7 @@
           </a:bodyPr>
           <a:lstStyle/>
           <a:p>
-            <a:pPr algn="ctr" indent="0" marL="0">
+            <a:pPr marL="0" indent="0" algn="ctr">
               <a:buNone/>
             </a:pPr>
             <a:r>
@@ -4839,6 +4606,13 @@
             <a:tailEnd type="triangle"/>
           </a:ln>
         </p:spPr>
+        <p:txBody>
+          <a:bodyPr/>
+          <a:lstStyle/>
+          <a:p>
+            <a:endParaRPr lang="en-US"/>
+          </a:p>
+        </p:txBody>
       </p:sp>
       <p:sp>
         <p:nvSpPr>
@@ -4864,6 +4638,13 @@
             <a:prstDash val="solid"/>
           </a:ln>
         </p:spPr>
+        <p:txBody>
+          <a:bodyPr/>
+          <a:lstStyle/>
+          <a:p>
+            <a:endParaRPr lang="en-US"/>
+          </a:p>
+        </p:txBody>
       </p:sp>
       <p:sp>
         <p:nvSpPr>
@@ -4888,7 +4669,7 @@
           </a:bodyPr>
           <a:lstStyle/>
           <a:p>
-            <a:pPr algn="ctr" indent="0" marL="0">
+            <a:pPr marL="0" indent="0" algn="ctr">
               <a:buNone/>
             </a:pPr>
             <a:r>
@@ -4930,6 +4711,13 @@
             <a:tailEnd type="triangle"/>
           </a:ln>
         </p:spPr>
+        <p:txBody>
+          <a:bodyPr/>
+          <a:lstStyle/>
+          <a:p>
+            <a:endParaRPr lang="en-US"/>
+          </a:p>
+        </p:txBody>
       </p:sp>
       <p:sp>
         <p:nvSpPr>
@@ -4955,6 +4743,13 @@
             <a:prstDash val="solid"/>
           </a:ln>
         </p:spPr>
+        <p:txBody>
+          <a:bodyPr/>
+          <a:lstStyle/>
+          <a:p>
+            <a:endParaRPr lang="en-US"/>
+          </a:p>
+        </p:txBody>
       </p:sp>
       <p:sp>
         <p:nvSpPr>
@@ -4979,7 +4774,7 @@
           </a:bodyPr>
           <a:lstStyle/>
           <a:p>
-            <a:pPr algn="ctr" indent="0" marL="0">
+            <a:pPr marL="0" indent="0" algn="ctr">
               <a:buNone/>
             </a:pPr>
             <a:r>
@@ -5021,6 +4816,13 @@
             <a:tailEnd type="triangle"/>
           </a:ln>
         </p:spPr>
+        <p:txBody>
+          <a:bodyPr/>
+          <a:lstStyle/>
+          <a:p>
+            <a:endParaRPr lang="en-US"/>
+          </a:p>
+        </p:txBody>
       </p:sp>
       <p:sp>
         <p:nvSpPr>
@@ -5046,6 +4848,13 @@
             <a:prstDash val="solid"/>
           </a:ln>
         </p:spPr>
+        <p:txBody>
+          <a:bodyPr/>
+          <a:lstStyle/>
+          <a:p>
+            <a:endParaRPr lang="en-US"/>
+          </a:p>
+        </p:txBody>
       </p:sp>
       <p:sp>
         <p:nvSpPr>
@@ -5070,7 +4879,7 @@
           </a:bodyPr>
           <a:lstStyle/>
           <a:p>
-            <a:pPr algn="ctr" indent="0" marL="0">
+            <a:pPr marL="0" indent="0" algn="ctr">
               <a:buNone/>
             </a:pPr>
             <a:r>
@@ -5112,6 +4921,13 @@
             <a:tailEnd type="triangle"/>
           </a:ln>
         </p:spPr>
+        <p:txBody>
+          <a:bodyPr/>
+          <a:lstStyle/>
+          <a:p>
+            <a:endParaRPr lang="en-US"/>
+          </a:p>
+        </p:txBody>
       </p:sp>
       <p:sp>
         <p:nvSpPr>
@@ -5137,6 +4953,13 @@
             <a:prstDash val="solid"/>
           </a:ln>
         </p:spPr>
+        <p:txBody>
+          <a:bodyPr/>
+          <a:lstStyle/>
+          <a:p>
+            <a:endParaRPr lang="en-US"/>
+          </a:p>
+        </p:txBody>
       </p:sp>
       <p:sp>
         <p:nvSpPr>
@@ -5161,7 +4984,7 @@
           </a:bodyPr>
           <a:lstStyle/>
           <a:p>
-            <a:pPr algn="ctr" indent="0" marL="0">
+            <a:pPr marL="0" indent="0" algn="ctr">
               <a:buNone/>
             </a:pPr>
             <a:r>
@@ -5181,17 +5004,17 @@
       </p:sp>
       <p:pic>
         <p:nvPicPr>
-          <p:cNvPr id="18" name="Image 0" descr="preencoded.png">    </p:cNvPr>
+          <p:cNvPr id="18" name="Image 0" descr="preencoded.png"/>
           <p:cNvPicPr>
             <a:picLocks noChangeAspect="1"/>
           </p:cNvPicPr>
           <p:nvPr/>
         </p:nvPicPr>
         <p:blipFill>
-          <a:blip r:embed="rId1">
+          <a:blip>
             <a:extLst>
               <a:ext uri="{96DAC541-7B7A-43D3-8B79-37D633B846F1}">
-                <asvg:svgBlip xmlns:asvg="http://schemas.microsoft.com/office/drawing/2016/SVG/main" r:embed="rId2"/>
+                <asvg:svgBlip xmlns:asvg="http://schemas.microsoft.com/office/drawing/2016/SVG/main" r:embed="rId3"/>
               </a:ext>
             </a:extLst>
           </a:blip>
@@ -5232,7 +5055,7 @@
           </a:bodyPr>
           <a:lstStyle/>
           <a:p>
-            <a:pPr indent="0" marL="0">
+            <a:pPr marL="0" indent="0">
               <a:buNone/>
             </a:pPr>
             <a:r>
@@ -5246,9 +5069,6 @@
               </a:rPr>
               <a:t>• </a:t>
             </a:r>
-            <a:pPr indent="0" marL="0">
-              <a:buNone/>
-            </a:pPr>
             <a:r>
               <a:rPr lang="en-US" sz="1650" dirty="0">
                 <a:solidFill>
@@ -5258,11 +5078,20 @@
                 <a:ea typeface="Aptos" pitchFamily="34" charset="-122"/>
                 <a:cs typeface="Aptos" pitchFamily="34" charset="-120"/>
               </a:rPr>
-              <a:t>Upsampling first makes the intermediate grid fine enough to represent the desired output sample times.</a:t>
-            </a:r>
-            <a:pPr indent="0" marL="0">
-              <a:buNone/>
-            </a:pPr>
+              <a:t>Upsampling first makes the intermediate grid fine enough to represent the desired output sample times.
+</a:t>
+            </a:r>
+            <a:r>
+              <a:rPr lang="en-US" sz="1650" b="1" dirty="0">
+                <a:solidFill>
+                  <a:srgbClr val="2F80A6"/>
+                </a:solidFill>
+                <a:latin typeface="Aptos" pitchFamily="34" charset="0"/>
+                <a:ea typeface="Aptos" pitchFamily="34" charset="-122"/>
+                <a:cs typeface="Aptos" pitchFamily="34" charset="-120"/>
+              </a:rPr>
+              <a:t>• </a:t>
+            </a:r>
             <a:r>
               <a:rPr lang="en-US" sz="1650" dirty="0">
                 <a:solidFill>
@@ -5272,12 +5101,9 @@
                 <a:ea typeface="Aptos" pitchFamily="34" charset="-122"/>
                 <a:cs typeface="Aptos" pitchFamily="34" charset="-120"/>
               </a:rPr>
-              <a:t>
+              <a:t>A single lowpass filter can remove interpolation images and prevent later decimation aliasing.
 </a:t>
             </a:r>
-            <a:pPr indent="0" marL="0">
-              <a:buNone/>
-            </a:pPr>
             <a:r>
               <a:rPr lang="en-US" sz="1650" b="1" dirty="0">
                 <a:solidFill>
@@ -5289,52 +5115,6 @@
               </a:rPr>
               <a:t>• </a:t>
             </a:r>
-            <a:pPr indent="0" marL="0">
-              <a:buNone/>
-            </a:pPr>
-            <a:r>
-              <a:rPr lang="en-US" sz="1650" dirty="0">
-                <a:solidFill>
-                  <a:srgbClr val="1E293B"/>
-                </a:solidFill>
-                <a:latin typeface="Aptos" pitchFamily="34" charset="0"/>
-                <a:ea typeface="Aptos" pitchFamily="34" charset="-122"/>
-                <a:cs typeface="Aptos" pitchFamily="34" charset="-120"/>
-              </a:rPr>
-              <a:t>A single lowpass filter can remove interpolation images and prevent later decimation aliasing.</a:t>
-            </a:r>
-            <a:pPr indent="0" marL="0">
-              <a:buNone/>
-            </a:pPr>
-            <a:r>
-              <a:rPr lang="en-US" sz="1650" dirty="0">
-                <a:solidFill>
-                  <a:srgbClr val="1E293B"/>
-                </a:solidFill>
-                <a:latin typeface="Aptos" pitchFamily="34" charset="0"/>
-                <a:ea typeface="Aptos" pitchFamily="34" charset="-122"/>
-                <a:cs typeface="Aptos" pitchFamily="34" charset="-120"/>
-              </a:rPr>
-              <a:t>
-</a:t>
-            </a:r>
-            <a:pPr indent="0" marL="0">
-              <a:buNone/>
-            </a:pPr>
-            <a:r>
-              <a:rPr lang="en-US" sz="1650" b="1" dirty="0">
-                <a:solidFill>
-                  <a:srgbClr val="2F80A6"/>
-                </a:solidFill>
-                <a:latin typeface="Aptos" pitchFamily="34" charset="0"/>
-                <a:ea typeface="Aptos" pitchFamily="34" charset="-122"/>
-                <a:cs typeface="Aptos" pitchFamily="34" charset="-120"/>
-              </a:rPr>
-              <a:t>• </a:t>
-            </a:r>
-            <a:pPr indent="0" marL="0">
-              <a:buNone/>
-            </a:pPr>
             <a:r>
               <a:rPr lang="en-US" sz="1650" dirty="0">
                 <a:solidFill>
@@ -5370,7 +5150,7 @@
           </a:prstGeom>
           <a:extLst>
             <a:ext uri="{C572A759-6A51-4108-AA02-DFA0A04FC94B}">
-              <ma14:wrappingTextBoxFlag xmlns:ma14="http://schemas.microsoft.com/office/mac/drawingml/2011/main" val="0"/>
+              <ma14:wrappingTextBoxFlag xmlns:ma14="http://schemas.microsoft.com/office/mac/drawingml/2011/main" xmlns="" val="0"/>
             </a:ext>
           </a:extLst>
         </p:spPr>
@@ -5391,7 +5171,7 @@
           <a:p>
             <a:pPr algn="r"/>
             <a:fld id="{F7021451-1387-4CA6-816F-3879F97B5CBC}" type="slidenum">
-              <a:rPr b="0" lang="en-US"/>
+              <a:rPr lang="en-US" b="0"/>
               <a:t>13</a:t>
             </a:fld>
             <a:endParaRPr lang="en-US"/>
@@ -5444,7 +5224,7 @@
           <a:bodyPr wrap="square" lIns="0" tIns="0" rIns="0" bIns="0" rtlCol="0" anchor="ctr"/>
           <a:lstStyle/>
           <a:p>
-            <a:pPr indent="0" marL="0">
+            <a:pPr marL="0" indent="0">
               <a:buNone/>
             </a:pPr>
             <a:r>
@@ -5485,7 +5265,7 @@
           </a:bodyPr>
           <a:lstStyle/>
           <a:p>
-            <a:pPr indent="0" marL="0">
+            <a:pPr marL="0" indent="0">
               <a:buNone/>
             </a:pPr>
             <a:r>
@@ -5505,17 +5285,17 @@
       </p:sp>
       <p:pic>
         <p:nvPicPr>
-          <p:cNvPr id="4" name="Image 0" descr="preencoded.png">    </p:cNvPr>
+          <p:cNvPr id="4" name="Image 0" descr="preencoded.png"/>
           <p:cNvPicPr>
             <a:picLocks noChangeAspect="1"/>
           </p:cNvPicPr>
           <p:nvPr/>
         </p:nvPicPr>
         <p:blipFill>
-          <a:blip r:embed="rId1">
+          <a:blip>
             <a:extLst>
               <a:ext uri="{96DAC541-7B7A-43D3-8B79-37D633B846F1}">
-                <asvg:svgBlip xmlns:asvg="http://schemas.microsoft.com/office/drawing/2016/SVG/main" r:embed="rId2"/>
+                <asvg:svgBlip xmlns:asvg="http://schemas.microsoft.com/office/drawing/2016/SVG/main" r:embed="rId3"/>
               </a:ext>
             </a:extLst>
           </a:blip>
@@ -5559,13 +5339,20 @@
             <a:prstDash val="solid"/>
           </a:ln>
           <a:effectLst>
-            <a:outerShdw sx="100000" sy="100000" kx="0" ky="0" algn="bl" rotWithShape="0" blurRad="16510" dist="8890" dir="2700000">
+            <a:outerShdw blurRad="16510" dist="8890" dir="2700000" algn="bl" rotWithShape="0">
               <a:srgbClr val="000000">
                 <a:alpha val="12000"/>
               </a:srgbClr>
             </a:outerShdw>
           </a:effectLst>
         </p:spPr>
+        <p:txBody>
+          <a:bodyPr/>
+          <a:lstStyle/>
+          <a:p>
+            <a:endParaRPr lang="en-US"/>
+          </a:p>
+        </p:txBody>
       </p:sp>
       <p:sp>
         <p:nvSpPr>
@@ -5588,7 +5375,7 @@
           <a:bodyPr wrap="square" lIns="0" tIns="0" rIns="0" bIns="0" rtlCol="0" anchor="ctr"/>
           <a:lstStyle/>
           <a:p>
-            <a:pPr indent="0" marL="0">
+            <a:pPr marL="0" indent="0">
               <a:buNone/>
             </a:pPr>
             <a:r>
@@ -5629,7 +5416,7 @@
           </a:bodyPr>
           <a:lstStyle/>
           <a:p>
-            <a:pPr indent="0" marL="0">
+            <a:pPr marL="0" indent="0">
               <a:buNone/>
             </a:pPr>
             <a:r>
@@ -5673,13 +5460,20 @@
             <a:prstDash val="solid"/>
           </a:ln>
           <a:effectLst>
-            <a:outerShdw sx="100000" sy="100000" kx="0" ky="0" algn="bl" rotWithShape="0" blurRad="16510" dist="8890" dir="2700000">
+            <a:outerShdw blurRad="16510" dist="8890" dir="2700000" algn="bl" rotWithShape="0">
               <a:srgbClr val="000000">
                 <a:alpha val="12000"/>
               </a:srgbClr>
             </a:outerShdw>
           </a:effectLst>
         </p:spPr>
+        <p:txBody>
+          <a:bodyPr/>
+          <a:lstStyle/>
+          <a:p>
+            <a:endParaRPr lang="en-US"/>
+          </a:p>
+        </p:txBody>
       </p:sp>
       <p:sp>
         <p:nvSpPr>
@@ -5702,7 +5496,7 @@
           <a:bodyPr wrap="square" lIns="0" tIns="0" rIns="0" bIns="0" rtlCol="0" anchor="ctr"/>
           <a:lstStyle/>
           <a:p>
-            <a:pPr indent="0" marL="0">
+            <a:pPr marL="0" indent="0">
               <a:buNone/>
             </a:pPr>
             <a:r>
@@ -5743,7 +5537,7 @@
           </a:bodyPr>
           <a:lstStyle/>
           <a:p>
-            <a:pPr indent="0" marL="0">
+            <a:pPr marL="0" indent="0">
               <a:buNone/>
             </a:pPr>
             <a:r>
@@ -5787,13 +5581,20 @@
             <a:prstDash val="solid"/>
           </a:ln>
           <a:effectLst>
-            <a:outerShdw sx="100000" sy="100000" kx="0" ky="0" algn="bl" rotWithShape="0" blurRad="16510" dist="8890" dir="2700000">
+            <a:outerShdw blurRad="16510" dist="8890" dir="2700000" algn="bl" rotWithShape="0">
               <a:srgbClr val="000000">
                 <a:alpha val="12000"/>
               </a:srgbClr>
             </a:outerShdw>
           </a:effectLst>
         </p:spPr>
+        <p:txBody>
+          <a:bodyPr/>
+          <a:lstStyle/>
+          <a:p>
+            <a:endParaRPr lang="en-US"/>
+          </a:p>
+        </p:txBody>
       </p:sp>
       <p:sp>
         <p:nvSpPr>
@@ -5816,7 +5617,7 @@
           <a:bodyPr wrap="square" lIns="0" tIns="0" rIns="0" bIns="0" rtlCol="0" anchor="ctr"/>
           <a:lstStyle/>
           <a:p>
-            <a:pPr indent="0" marL="0">
+            <a:pPr marL="0" indent="0">
               <a:buNone/>
             </a:pPr>
             <a:r>
@@ -5857,7 +5658,7 @@
           </a:bodyPr>
           <a:lstStyle/>
           <a:p>
-            <a:pPr indent="0" marL="0">
+            <a:pPr marL="0" indent="0">
               <a:buNone/>
             </a:pPr>
             <a:r>
@@ -5895,7 +5696,7 @@
           </a:prstGeom>
           <a:extLst>
             <a:ext uri="{C572A759-6A51-4108-AA02-DFA0A04FC94B}">
-              <ma14:wrappingTextBoxFlag xmlns:ma14="http://schemas.microsoft.com/office/mac/drawingml/2011/main" val="0"/>
+              <ma14:wrappingTextBoxFlag xmlns:ma14="http://schemas.microsoft.com/office/mac/drawingml/2011/main" xmlns="" val="0"/>
             </a:ext>
           </a:extLst>
         </p:spPr>
@@ -5916,7 +5717,7 @@
           <a:p>
             <a:pPr algn="r"/>
             <a:fld id="{F7021451-1387-4CA6-816F-3879F97B5CBC}" type="slidenum">
-              <a:rPr b="0" lang="en-US"/>
+              <a:rPr lang="en-US" b="0"/>
               <a:t>14</a:t>
             </a:fld>
             <a:endParaRPr lang="en-US"/>
@@ -5969,7 +5770,7 @@
           <a:bodyPr wrap="square" lIns="0" tIns="0" rIns="0" bIns="0" rtlCol="0" anchor="ctr"/>
           <a:lstStyle/>
           <a:p>
-            <a:pPr indent="0" marL="0">
+            <a:pPr marL="0" indent="0">
               <a:buNone/>
             </a:pPr>
             <a:r>
@@ -6010,7 +5811,7 @@
           </a:bodyPr>
           <a:lstStyle/>
           <a:p>
-            <a:pPr indent="0" marL="0">
+            <a:pPr marL="0" indent="0">
               <a:buNone/>
             </a:pPr>
             <a:r>
@@ -6054,13 +5855,20 @@
             <a:prstDash val="solid"/>
           </a:ln>
           <a:effectLst>
-            <a:outerShdw sx="100000" sy="100000" kx="0" ky="0" algn="bl" rotWithShape="0" blurRad="16510" dist="8890" dir="2700000">
+            <a:outerShdw blurRad="16510" dist="8890" dir="2700000" algn="bl" rotWithShape="0">
               <a:srgbClr val="000000">
                 <a:alpha val="12000"/>
               </a:srgbClr>
             </a:outerShdw>
           </a:effectLst>
         </p:spPr>
+        <p:txBody>
+          <a:bodyPr/>
+          <a:lstStyle/>
+          <a:p>
+            <a:endParaRPr lang="en-US"/>
+          </a:p>
+        </p:txBody>
       </p:sp>
       <p:sp>
         <p:nvSpPr>
@@ -6083,7 +5891,7 @@
           <a:bodyPr wrap="square" lIns="0" tIns="0" rIns="0" bIns="0" rtlCol="0" anchor="ctr"/>
           <a:lstStyle/>
           <a:p>
-            <a:pPr indent="0" marL="0">
+            <a:pPr marL="0" indent="0">
               <a:buNone/>
             </a:pPr>
             <a:r>
@@ -6124,7 +5932,7 @@
           </a:bodyPr>
           <a:lstStyle/>
           <a:p>
-            <a:pPr indent="0" marL="0">
+            <a:pPr marL="0" indent="0">
               <a:buNone/>
             </a:pPr>
             <a:r>
@@ -6168,13 +5976,20 @@
             <a:prstDash val="solid"/>
           </a:ln>
           <a:effectLst>
-            <a:outerShdw sx="100000" sy="100000" kx="0" ky="0" algn="bl" rotWithShape="0" blurRad="16510" dist="8890" dir="2700000">
+            <a:outerShdw blurRad="16510" dist="8890" dir="2700000" algn="bl" rotWithShape="0">
               <a:srgbClr val="000000">
                 <a:alpha val="12000"/>
               </a:srgbClr>
             </a:outerShdw>
           </a:effectLst>
         </p:spPr>
+        <p:txBody>
+          <a:bodyPr/>
+          <a:lstStyle/>
+          <a:p>
+            <a:endParaRPr lang="en-US"/>
+          </a:p>
+        </p:txBody>
       </p:sp>
       <p:sp>
         <p:nvSpPr>
@@ -6197,7 +6012,7 @@
           <a:bodyPr wrap="square" lIns="0" tIns="0" rIns="0" bIns="0" rtlCol="0" anchor="ctr"/>
           <a:lstStyle/>
           <a:p>
-            <a:pPr indent="0" marL="0">
+            <a:pPr marL="0" indent="0">
               <a:buNone/>
             </a:pPr>
             <a:r>
@@ -6238,7 +6053,7 @@
           </a:bodyPr>
           <a:lstStyle/>
           <a:p>
-            <a:pPr indent="0" marL="0">
+            <a:pPr marL="0" indent="0">
               <a:buNone/>
             </a:pPr>
             <a:r>
@@ -6282,13 +6097,20 @@
             <a:prstDash val="solid"/>
           </a:ln>
           <a:effectLst>
-            <a:outerShdw sx="100000" sy="100000" kx="0" ky="0" algn="bl" rotWithShape="0" blurRad="16510" dist="8890" dir="2700000">
+            <a:outerShdw blurRad="16510" dist="8890" dir="2700000" algn="bl" rotWithShape="0">
               <a:srgbClr val="000000">
                 <a:alpha val="12000"/>
               </a:srgbClr>
             </a:outerShdw>
           </a:effectLst>
         </p:spPr>
+        <p:txBody>
+          <a:bodyPr/>
+          <a:lstStyle/>
+          <a:p>
+            <a:endParaRPr lang="en-US"/>
+          </a:p>
+        </p:txBody>
       </p:sp>
       <p:sp>
         <p:nvSpPr>
@@ -6311,7 +6133,7 @@
           <a:bodyPr wrap="square" lIns="0" tIns="0" rIns="0" bIns="0" rtlCol="0" anchor="ctr"/>
           <a:lstStyle/>
           <a:p>
-            <a:pPr indent="0" marL="0">
+            <a:pPr marL="0" indent="0">
               <a:buNone/>
             </a:pPr>
             <a:r>
@@ -6352,7 +6174,7 @@
           </a:bodyPr>
           <a:lstStyle/>
           <a:p>
-            <a:pPr indent="0" marL="0">
+            <a:pPr marL="0" indent="0">
               <a:buNone/>
             </a:pPr>
             <a:r>
@@ -6372,14 +6194,14 @@
       </p:sp>
       <p:pic>
         <p:nvPicPr>
-          <p:cNvPr id="13" name="Image 0" descr="/mnt/data/week6_multirate/assets/rational_48_to_44.png">    </p:cNvPr>
+          <p:cNvPr id="13" name="Image 0" descr="/mnt/data/week6_multirate/assets/rational_48_to_44.png"/>
           <p:cNvPicPr>
             <a:picLocks noChangeAspect="1"/>
           </p:cNvPicPr>
           <p:nvPr/>
         </p:nvPicPr>
         <p:blipFill>
-          <a:blip r:embed="rId1"/>
+          <a:blip r:embed="rId3"/>
           <a:stretch>
             <a:fillRect/>
           </a:stretch>
@@ -6414,7 +6236,7 @@
           </a:prstGeom>
           <a:extLst>
             <a:ext uri="{C572A759-6A51-4108-AA02-DFA0A04FC94B}">
-              <ma14:wrappingTextBoxFlag xmlns:ma14="http://schemas.microsoft.com/office/mac/drawingml/2011/main" val="0"/>
+              <ma14:wrappingTextBoxFlag xmlns:ma14="http://schemas.microsoft.com/office/mac/drawingml/2011/main" xmlns="" val="0"/>
             </a:ext>
           </a:extLst>
         </p:spPr>
@@ -6435,7 +6257,7 @@
           <a:p>
             <a:pPr algn="r"/>
             <a:fld id="{F7021451-1387-4CA6-816F-3879F97B5CBC}" type="slidenum">
-              <a:rPr b="0" lang="en-US"/>
+              <a:rPr lang="en-US" b="0"/>
               <a:t>15</a:t>
             </a:fld>
             <a:endParaRPr lang="en-US"/>
@@ -6458,6 +6280,7 @@
         <a:solidFill>
           <a:srgbClr val="16324F"/>
         </a:solidFill>
+        <a:effectLst/>
       </p:bgPr>
     </p:bg>
     <p:spTree>
@@ -6495,7 +6318,7 @@
           <a:bodyPr wrap="square" lIns="0" tIns="0" rIns="0" bIns="0" rtlCol="0" anchor="ctr"/>
           <a:lstStyle/>
           <a:p>
-            <a:pPr indent="0" marL="0">
+            <a:pPr marL="0" indent="0">
               <a:buNone/>
             </a:pPr>
             <a:r>
@@ -6536,7 +6359,7 @@
           </a:bodyPr>
           <a:lstStyle/>
           <a:p>
-            <a:pPr indent="0" marL="0">
+            <a:pPr marL="0" indent="0">
               <a:buNone/>
             </a:pPr>
             <a:r>
@@ -6577,7 +6400,7 @@
           </a:bodyPr>
           <a:lstStyle/>
           <a:p>
-            <a:pPr indent="0" marL="0">
+            <a:pPr marL="0" indent="0">
               <a:buNone/>
             </a:pPr>
             <a:r>
@@ -6641,7 +6464,7 @@
           <a:bodyPr wrap="square" lIns="0" tIns="0" rIns="0" bIns="0" rtlCol="0" anchor="ctr"/>
           <a:lstStyle/>
           <a:p>
-            <a:pPr indent="0" marL="0">
+            <a:pPr marL="0" indent="0">
               <a:buNone/>
             </a:pPr>
             <a:r>
@@ -6682,7 +6505,7 @@
           </a:bodyPr>
           <a:lstStyle/>
           <a:p>
-            <a:pPr indent="0" marL="0">
+            <a:pPr marL="0" indent="0">
               <a:buNone/>
             </a:pPr>
             <a:r>
@@ -6724,6 +6547,13 @@
             <a:prstDash val="solid"/>
           </a:ln>
         </p:spPr>
+        <p:txBody>
+          <a:bodyPr/>
+          <a:lstStyle/>
+          <a:p>
+            <a:endParaRPr lang="en-US"/>
+          </a:p>
+        </p:txBody>
       </p:sp>
       <p:sp>
         <p:nvSpPr>
@@ -6748,7 +6578,7 @@
           </a:bodyPr>
           <a:lstStyle/>
           <a:p>
-            <a:pPr algn="ctr" indent="0" marL="0">
+            <a:pPr marL="0" indent="0" algn="ctr">
               <a:buNone/>
             </a:pPr>
             <a:r>
@@ -6765,7 +6595,7 @@
             <a:endParaRPr lang="en-US" sz="1600" dirty="0"/>
           </a:p>
           <a:p>
-            <a:pPr algn="ctr" indent="0" marL="0">
+            <a:pPr marL="0" indent="0" algn="ctr">
               <a:buNone/>
             </a:pPr>
             <a:r>
@@ -6807,6 +6637,13 @@
             <a:tailEnd type="triangle"/>
           </a:ln>
         </p:spPr>
+        <p:txBody>
+          <a:bodyPr/>
+          <a:lstStyle/>
+          <a:p>
+            <a:endParaRPr lang="en-US"/>
+          </a:p>
+        </p:txBody>
       </p:sp>
       <p:sp>
         <p:nvSpPr>
@@ -6832,6 +6669,13 @@
             <a:prstDash val="solid"/>
           </a:ln>
         </p:spPr>
+        <p:txBody>
+          <a:bodyPr/>
+          <a:lstStyle/>
+          <a:p>
+            <a:endParaRPr lang="en-US"/>
+          </a:p>
+        </p:txBody>
       </p:sp>
       <p:sp>
         <p:nvSpPr>
@@ -6856,7 +6700,7 @@
           </a:bodyPr>
           <a:lstStyle/>
           <a:p>
-            <a:pPr algn="ctr" indent="0" marL="0">
+            <a:pPr marL="0" indent="0" algn="ctr">
               <a:buNone/>
             </a:pPr>
             <a:r>
@@ -6873,7 +6717,7 @@
             <a:endParaRPr lang="en-US" sz="1600" dirty="0"/>
           </a:p>
           <a:p>
-            <a:pPr algn="ctr" indent="0" marL="0">
+            <a:pPr marL="0" indent="0" algn="ctr">
               <a:buNone/>
             </a:pPr>
             <a:r>
@@ -6915,6 +6759,13 @@
             <a:tailEnd type="triangle"/>
           </a:ln>
         </p:spPr>
+        <p:txBody>
+          <a:bodyPr/>
+          <a:lstStyle/>
+          <a:p>
+            <a:endParaRPr lang="en-US"/>
+          </a:p>
+        </p:txBody>
       </p:sp>
       <p:sp>
         <p:nvSpPr>
@@ -6940,6 +6791,13 @@
             <a:prstDash val="solid"/>
           </a:ln>
         </p:spPr>
+        <p:txBody>
+          <a:bodyPr/>
+          <a:lstStyle/>
+          <a:p>
+            <a:endParaRPr lang="en-US"/>
+          </a:p>
+        </p:txBody>
       </p:sp>
       <p:sp>
         <p:nvSpPr>
@@ -6964,7 +6822,7 @@
           </a:bodyPr>
           <a:lstStyle/>
           <a:p>
-            <a:pPr algn="ctr" indent="0" marL="0">
+            <a:pPr marL="0" indent="0" algn="ctr">
               <a:buNone/>
             </a:pPr>
             <a:r>
@@ -6981,7 +6839,7 @@
             <a:endParaRPr lang="en-US" sz="1600" dirty="0"/>
           </a:p>
           <a:p>
-            <a:pPr algn="ctr" indent="0" marL="0">
+            <a:pPr marL="0" indent="0" algn="ctr">
               <a:buNone/>
             </a:pPr>
             <a:r>
@@ -7023,6 +6881,13 @@
             <a:tailEnd type="triangle"/>
           </a:ln>
         </p:spPr>
+        <p:txBody>
+          <a:bodyPr/>
+          <a:lstStyle/>
+          <a:p>
+            <a:endParaRPr lang="en-US"/>
+          </a:p>
+        </p:txBody>
       </p:sp>
       <p:sp>
         <p:nvSpPr>
@@ -7048,6 +6913,13 @@
             <a:prstDash val="solid"/>
           </a:ln>
         </p:spPr>
+        <p:txBody>
+          <a:bodyPr/>
+          <a:lstStyle/>
+          <a:p>
+            <a:endParaRPr lang="en-US"/>
+          </a:p>
+        </p:txBody>
       </p:sp>
       <p:sp>
         <p:nvSpPr>
@@ -7072,7 +6944,7 @@
           </a:bodyPr>
           <a:lstStyle/>
           <a:p>
-            <a:pPr algn="ctr" indent="0" marL="0">
+            <a:pPr marL="0" indent="0" algn="ctr">
               <a:buNone/>
             </a:pPr>
             <a:r>
@@ -7089,7 +6961,7 @@
             <a:endParaRPr lang="en-US" sz="1600" dirty="0"/>
           </a:p>
           <a:p>
-            <a:pPr algn="ctr" indent="0" marL="0">
+            <a:pPr marL="0" indent="0" algn="ctr">
               <a:buNone/>
             </a:pPr>
             <a:r>
@@ -7130,7 +7002,7 @@
           </a:bodyPr>
           <a:lstStyle/>
           <a:p>
-            <a:pPr indent="0" marL="0">
+            <a:pPr marL="0" indent="0">
               <a:buNone/>
             </a:pPr>
             <a:r>
@@ -7144,9 +7016,6 @@
               </a:rPr>
               <a:t>• </a:t>
             </a:r>
-            <a:pPr indent="0" marL="0">
-              <a:buNone/>
-            </a:pPr>
             <a:r>
               <a:rPr lang="en-US" sz="1700" dirty="0">
                 <a:solidFill>
@@ -7156,11 +7025,20 @@
                 <a:ea typeface="Aptos" pitchFamily="34" charset="-122"/>
                 <a:cs typeface="Aptos" pitchFamily="34" charset="-120"/>
               </a:rPr>
-              <a:t>For stride &gt; 1, transposed convolution can be viewed as inserting zeros and then applying a learned filter (with indexing/padding details).</a:t>
-            </a:r>
-            <a:pPr indent="0" marL="0">
-              <a:buNone/>
-            </a:pPr>
+              <a:t>For stride &gt; 1, transposed convolution can be viewed as inserting zeros and then applying a learned filter (with indexing/padding details).
+</a:t>
+            </a:r>
+            <a:r>
+              <a:rPr lang="en-US" sz="1700" b="1" dirty="0">
+                <a:solidFill>
+                  <a:srgbClr val="2F80A6"/>
+                </a:solidFill>
+                <a:latin typeface="Aptos" pitchFamily="34" charset="0"/>
+                <a:ea typeface="Aptos" pitchFamily="34" charset="-122"/>
+                <a:cs typeface="Aptos" pitchFamily="34" charset="-120"/>
+              </a:rPr>
+              <a:t>• </a:t>
+            </a:r>
             <a:r>
               <a:rPr lang="en-US" sz="1700" dirty="0">
                 <a:solidFill>
@@ -7170,12 +7048,9 @@
                 <a:ea typeface="Aptos" pitchFamily="34" charset="-122"/>
                 <a:cs typeface="Aptos" pitchFamily="34" charset="-120"/>
               </a:rPr>
-              <a:t>
+              <a:t>The learned filter is not automatically an anti-imaging filter.
 </a:t>
             </a:r>
-            <a:pPr indent="0" marL="0">
-              <a:buNone/>
-            </a:pPr>
             <a:r>
               <a:rPr lang="en-US" sz="1700" b="1" dirty="0">
                 <a:solidFill>
@@ -7187,52 +7062,6 @@
               </a:rPr>
               <a:t>• </a:t>
             </a:r>
-            <a:pPr indent="0" marL="0">
-              <a:buNone/>
-            </a:pPr>
-            <a:r>
-              <a:rPr lang="en-US" sz="1700" dirty="0">
-                <a:solidFill>
-                  <a:srgbClr val="1E293B"/>
-                </a:solidFill>
-                <a:latin typeface="Aptos" pitchFamily="34" charset="0"/>
-                <a:ea typeface="Aptos" pitchFamily="34" charset="-122"/>
-                <a:cs typeface="Aptos" pitchFamily="34" charset="-120"/>
-              </a:rPr>
-              <a:t>The learned filter is not automatically an anti-imaging filter.</a:t>
-            </a:r>
-            <a:pPr indent="0" marL="0">
-              <a:buNone/>
-            </a:pPr>
-            <a:r>
-              <a:rPr lang="en-US" sz="1700" dirty="0">
-                <a:solidFill>
-                  <a:srgbClr val="1E293B"/>
-                </a:solidFill>
-                <a:latin typeface="Aptos" pitchFamily="34" charset="0"/>
-                <a:ea typeface="Aptos" pitchFamily="34" charset="-122"/>
-                <a:cs typeface="Aptos" pitchFamily="34" charset="-120"/>
-              </a:rPr>
-              <a:t>
-</a:t>
-            </a:r>
-            <a:pPr indent="0" marL="0">
-              <a:buNone/>
-            </a:pPr>
-            <a:r>
-              <a:rPr lang="en-US" sz="1700" b="1" dirty="0">
-                <a:solidFill>
-                  <a:srgbClr val="2F80A6"/>
-                </a:solidFill>
-                <a:latin typeface="Aptos" pitchFamily="34" charset="0"/>
-                <a:ea typeface="Aptos" pitchFamily="34" charset="-122"/>
-                <a:cs typeface="Aptos" pitchFamily="34" charset="-120"/>
-              </a:rPr>
-              <a:t>• </a:t>
-            </a:r>
-            <a:pPr indent="0" marL="0">
-              <a:buNone/>
-            </a:pPr>
             <a:r>
               <a:rPr lang="en-US" sz="1700" dirty="0">
                 <a:solidFill>
@@ -7268,7 +7097,7 @@
           </a:prstGeom>
           <a:extLst>
             <a:ext uri="{C572A759-6A51-4108-AA02-DFA0A04FC94B}">
-              <ma14:wrappingTextBoxFlag xmlns:ma14="http://schemas.microsoft.com/office/mac/drawingml/2011/main" val="0"/>
+              <ma14:wrappingTextBoxFlag xmlns:ma14="http://schemas.microsoft.com/office/mac/drawingml/2011/main" xmlns="" val="0"/>
             </a:ext>
           </a:extLst>
         </p:spPr>
@@ -7289,7 +7118,7 @@
           <a:p>
             <a:pPr algn="r"/>
             <a:fld id="{F7021451-1387-4CA6-816F-3879F97B5CBC}" type="slidenum">
-              <a:rPr b="0" lang="en-US"/>
+              <a:rPr lang="en-US" b="0"/>
               <a:t>17</a:t>
             </a:fld>
             <a:endParaRPr lang="en-US"/>
@@ -7342,7 +7171,7 @@
           <a:bodyPr wrap="square" lIns="0" tIns="0" rIns="0" bIns="0" rtlCol="0" anchor="ctr"/>
           <a:lstStyle/>
           <a:p>
-            <a:pPr indent="0" marL="0">
+            <a:pPr marL="0" indent="0">
               <a:buNone/>
             </a:pPr>
             <a:r>
@@ -7383,7 +7212,7 @@
           </a:bodyPr>
           <a:lstStyle/>
           <a:p>
-            <a:pPr indent="0" marL="0">
+            <a:pPr marL="0" indent="0">
               <a:buNone/>
             </a:pPr>
             <a:r>
@@ -7403,14 +7232,14 @@
       </p:sp>
       <p:pic>
         <p:nvPicPr>
-          <p:cNvPr id="4" name="Image 0" descr="/mnt/data/week6_multirate/assets/transpose_overlap.png">    </p:cNvPr>
+          <p:cNvPr id="4" name="Image 0" descr="/mnt/data/week6_multirate/assets/transpose_overlap.png"/>
           <p:cNvPicPr>
             <a:picLocks noChangeAspect="1"/>
           </p:cNvPicPr>
           <p:nvPr/>
         </p:nvPicPr>
         <p:blipFill>
-          <a:blip r:embed="rId1"/>
+          <a:blip r:embed="rId3"/>
           <a:stretch>
             <a:fillRect/>
           </a:stretch>
@@ -7448,7 +7277,7 @@
           </a:bodyPr>
           <a:lstStyle/>
           <a:p>
-            <a:pPr indent="0" marL="0">
+            <a:pPr marL="0" indent="0">
               <a:buNone/>
             </a:pPr>
             <a:r>
@@ -7462,9 +7291,6 @@
               </a:rPr>
               <a:t>• </a:t>
             </a:r>
-            <a:pPr indent="0" marL="0">
-              <a:buNone/>
-            </a:pPr>
             <a:r>
               <a:rPr lang="en-US" sz="1680" b="1" dirty="0">
                 <a:solidFill>
@@ -7476,9 +7302,6 @@
               </a:rPr>
               <a:t>Uneven overlap:</a:t>
             </a:r>
-            <a:pPr indent="0" marL="0">
-              <a:buNone/>
-            </a:pPr>
             <a:r>
               <a:rPr lang="en-US" sz="1680" dirty="0">
                 <a:solidFill>
@@ -7488,11 +7311,31 @@
                 <a:ea typeface="Aptos" pitchFamily="34" charset="-122"/>
                 <a:cs typeface="Aptos" pitchFamily="34" charset="-120"/>
               </a:rPr>
-              <a:t> some output positions receive more kernel contributions than others.</a:t>
-            </a:r>
-            <a:pPr indent="0" marL="0">
-              <a:buNone/>
-            </a:pPr>
+              <a:t> some output positions receive more kernel contributions than others.
+</a:t>
+            </a:r>
+            <a:r>
+              <a:rPr lang="en-US" sz="1680" b="1" dirty="0">
+                <a:solidFill>
+                  <a:srgbClr val="2F80A6"/>
+                </a:solidFill>
+                <a:latin typeface="Aptos" pitchFamily="34" charset="0"/>
+                <a:ea typeface="Aptos" pitchFamily="34" charset="-122"/>
+                <a:cs typeface="Aptos" pitchFamily="34" charset="-120"/>
+              </a:rPr>
+              <a:t>• </a:t>
+            </a:r>
+            <a:r>
+              <a:rPr lang="en-US" sz="1680" b="1" dirty="0">
+                <a:solidFill>
+                  <a:srgbClr val="1E293B"/>
+                </a:solidFill>
+                <a:latin typeface="Aptos" pitchFamily="34" charset="0"/>
+                <a:ea typeface="Aptos" pitchFamily="34" charset="-122"/>
+                <a:cs typeface="Aptos" pitchFamily="34" charset="-120"/>
+              </a:rPr>
+              <a:t>Spectral images:</a:t>
+            </a:r>
             <a:r>
               <a:rPr lang="en-US" sz="1680" dirty="0">
                 <a:solidFill>
@@ -7502,12 +7345,9 @@
                 <a:ea typeface="Aptos" pitchFamily="34" charset="-122"/>
                 <a:cs typeface="Aptos" pitchFamily="34" charset="-120"/>
               </a:rPr>
-              <a:t>
+              <a:t> zero insertion creates replicas that a learned kernel may not suppress.
 </a:t>
             </a:r>
-            <a:pPr indent="0" marL="0">
-              <a:buNone/>
-            </a:pPr>
             <a:r>
               <a:rPr lang="en-US" sz="1680" b="1" dirty="0">
                 <a:solidFill>
@@ -7519,9 +7359,6 @@
               </a:rPr>
               <a:t>• </a:t>
             </a:r>
-            <a:pPr indent="0" marL="0">
-              <a:buNone/>
-            </a:pPr>
             <a:r>
               <a:rPr lang="en-US" sz="1680" b="1" dirty="0">
                 <a:solidFill>
@@ -7531,68 +7368,8 @@
                 <a:ea typeface="Aptos" pitchFamily="34" charset="-122"/>
                 <a:cs typeface="Aptos" pitchFamily="34" charset="-120"/>
               </a:rPr>
-              <a:t>Spectral images:</a:t>
-            </a:r>
-            <a:pPr indent="0" marL="0">
-              <a:buNone/>
-            </a:pPr>
-            <a:r>
-              <a:rPr lang="en-US" sz="1680" dirty="0">
-                <a:solidFill>
-                  <a:srgbClr val="1E293B"/>
-                </a:solidFill>
-                <a:latin typeface="Aptos" pitchFamily="34" charset="0"/>
-                <a:ea typeface="Aptos" pitchFamily="34" charset="-122"/>
-                <a:cs typeface="Aptos" pitchFamily="34" charset="-120"/>
-              </a:rPr>
-              <a:t> zero insertion creates replicas that a learned kernel may not suppress.</a:t>
-            </a:r>
-            <a:pPr indent="0" marL="0">
-              <a:buNone/>
-            </a:pPr>
-            <a:r>
-              <a:rPr lang="en-US" sz="1680" dirty="0">
-                <a:solidFill>
-                  <a:srgbClr val="1E293B"/>
-                </a:solidFill>
-                <a:latin typeface="Aptos" pitchFamily="34" charset="0"/>
-                <a:ea typeface="Aptos" pitchFamily="34" charset="-122"/>
-                <a:cs typeface="Aptos" pitchFamily="34" charset="-120"/>
-              </a:rPr>
-              <a:t>
-</a:t>
-            </a:r>
-            <a:pPr indent="0" marL="0">
-              <a:buNone/>
-            </a:pPr>
-            <a:r>
-              <a:rPr lang="en-US" sz="1680" b="1" dirty="0">
-                <a:solidFill>
-                  <a:srgbClr val="2F80A6"/>
-                </a:solidFill>
-                <a:latin typeface="Aptos" pitchFamily="34" charset="0"/>
-                <a:ea typeface="Aptos" pitchFamily="34" charset="-122"/>
-                <a:cs typeface="Aptos" pitchFamily="34" charset="-120"/>
-              </a:rPr>
-              <a:t>• </a:t>
-            </a:r>
-            <a:pPr indent="0" marL="0">
-              <a:buNone/>
-            </a:pPr>
-            <a:r>
-              <a:rPr lang="en-US" sz="1680" b="1" dirty="0">
-                <a:solidFill>
-                  <a:srgbClr val="1E293B"/>
-                </a:solidFill>
-                <a:latin typeface="Aptos" pitchFamily="34" charset="0"/>
-                <a:ea typeface="Aptos" pitchFamily="34" charset="-122"/>
-                <a:cs typeface="Aptos" pitchFamily="34" charset="-120"/>
-              </a:rPr>
               <a:t>Training can exploit phase patterns:</a:t>
             </a:r>
-            <a:pPr indent="0" marL="0">
-              <a:buNone/>
-            </a:pPr>
             <a:r>
               <a:rPr lang="en-US" sz="1680" dirty="0">
                 <a:solidFill>
@@ -7634,13 +7411,20 @@
             <a:prstDash val="solid"/>
           </a:ln>
           <a:effectLst>
-            <a:outerShdw sx="100000" sy="100000" kx="0" ky="0" algn="bl" rotWithShape="0" blurRad="16510" dist="8890" dir="2700000">
+            <a:outerShdw blurRad="16510" dist="8890" dir="2700000" algn="bl" rotWithShape="0">
               <a:srgbClr val="000000">
                 <a:alpha val="12000"/>
               </a:srgbClr>
             </a:outerShdw>
           </a:effectLst>
         </p:spPr>
+        <p:txBody>
+          <a:bodyPr/>
+          <a:lstStyle/>
+          <a:p>
+            <a:endParaRPr lang="en-US"/>
+          </a:p>
+        </p:txBody>
       </p:sp>
       <p:sp>
         <p:nvSpPr>
@@ -7663,7 +7447,7 @@
           <a:bodyPr wrap="square" lIns="0" tIns="0" rIns="0" bIns="0" rtlCol="0" anchor="ctr"/>
           <a:lstStyle/>
           <a:p>
-            <a:pPr indent="0" marL="0">
+            <a:pPr marL="0" indent="0">
               <a:buNone/>
             </a:pPr>
             <a:r>
@@ -7700,11 +7484,11 @@
         </p:spPr>
         <p:txBody>
           <a:bodyPr wrap="square" lIns="0" tIns="0" rIns="0" bIns="0" rtlCol="0" anchor="ctr">
-            <a:normAutofit/>
+            <a:normAutofit fontScale="92500" lnSpcReduction="10000"/>
           </a:bodyPr>
           <a:lstStyle/>
           <a:p>
-            <a:pPr indent="0" marL="0">
+            <a:pPr marL="0" indent="0">
               <a:buNone/>
             </a:pPr>
             <a:r>
@@ -7742,7 +7526,7 @@
           </a:prstGeom>
           <a:extLst>
             <a:ext uri="{C572A759-6A51-4108-AA02-DFA0A04FC94B}">
-              <ma14:wrappingTextBoxFlag xmlns:ma14="http://schemas.microsoft.com/office/mac/drawingml/2011/main" val="0"/>
+              <ma14:wrappingTextBoxFlag xmlns:ma14="http://schemas.microsoft.com/office/mac/drawingml/2011/main" xmlns="" val="0"/>
             </a:ext>
           </a:extLst>
         </p:spPr>
@@ -7763,7 +7547,7 @@
           <a:p>
             <a:pPr algn="r"/>
             <a:fld id="{F7021451-1387-4CA6-816F-3879F97B5CBC}" type="slidenum">
-              <a:rPr b="0" lang="en-US"/>
+              <a:rPr lang="en-US" b="0"/>
               <a:t>18</a:t>
             </a:fld>
             <a:endParaRPr lang="en-US"/>
@@ -7816,7 +7600,7 @@
           <a:bodyPr wrap="square" lIns="0" tIns="0" rIns="0" bIns="0" rtlCol="0" anchor="ctr"/>
           <a:lstStyle/>
           <a:p>
-            <a:pPr indent="0" marL="0">
+            <a:pPr marL="0" indent="0">
               <a:buNone/>
             </a:pPr>
             <a:r>
@@ -7857,7 +7641,7 @@
           </a:bodyPr>
           <a:lstStyle/>
           <a:p>
-            <a:pPr indent="0" marL="0">
+            <a:pPr marL="0" indent="0">
               <a:buNone/>
             </a:pPr>
             <a:r>
@@ -7901,13 +7685,20 @@
             <a:prstDash val="solid"/>
           </a:ln>
           <a:effectLst>
-            <a:outerShdw sx="100000" sy="100000" kx="0" ky="0" algn="bl" rotWithShape="0" blurRad="16510" dist="8890" dir="2700000">
+            <a:outerShdw blurRad="16510" dist="8890" dir="2700000" algn="bl" rotWithShape="0">
               <a:srgbClr val="000000">
                 <a:alpha val="12000"/>
               </a:srgbClr>
             </a:outerShdw>
           </a:effectLst>
         </p:spPr>
+        <p:txBody>
+          <a:bodyPr/>
+          <a:lstStyle/>
+          <a:p>
+            <a:endParaRPr lang="en-US"/>
+          </a:p>
+        </p:txBody>
       </p:sp>
       <p:sp>
         <p:nvSpPr>
@@ -7930,7 +7721,7 @@
           <a:bodyPr wrap="square" lIns="0" tIns="0" rIns="0" bIns="0" rtlCol="0" anchor="ctr"/>
           <a:lstStyle/>
           <a:p>
-            <a:pPr indent="0" marL="0">
+            <a:pPr marL="0" indent="0">
               <a:buNone/>
             </a:pPr>
             <a:r>
@@ -7971,7 +7762,7 @@
           </a:bodyPr>
           <a:lstStyle/>
           <a:p>
-            <a:pPr indent="0" marL="0">
+            <a:pPr marL="0" indent="0">
               <a:buNone/>
             </a:pPr>
             <a:r>
@@ -8015,13 +7806,20 @@
             <a:prstDash val="solid"/>
           </a:ln>
           <a:effectLst>
-            <a:outerShdw sx="100000" sy="100000" kx="0" ky="0" algn="bl" rotWithShape="0" blurRad="16510" dist="8890" dir="2700000">
+            <a:outerShdw blurRad="16510" dist="8890" dir="2700000" algn="bl" rotWithShape="0">
               <a:srgbClr val="000000">
                 <a:alpha val="12000"/>
               </a:srgbClr>
             </a:outerShdw>
           </a:effectLst>
         </p:spPr>
+        <p:txBody>
+          <a:bodyPr/>
+          <a:lstStyle/>
+          <a:p>
+            <a:endParaRPr lang="en-US"/>
+          </a:p>
+        </p:txBody>
       </p:sp>
       <p:sp>
         <p:nvSpPr>
@@ -8044,7 +7842,7 @@
           <a:bodyPr wrap="square" lIns="0" tIns="0" rIns="0" bIns="0" rtlCol="0" anchor="ctr"/>
           <a:lstStyle/>
           <a:p>
-            <a:pPr indent="0" marL="0">
+            <a:pPr marL="0" indent="0">
               <a:buNone/>
             </a:pPr>
             <a:r>
@@ -8085,7 +7883,7 @@
           </a:bodyPr>
           <a:lstStyle/>
           <a:p>
-            <a:pPr indent="0" marL="0">
+            <a:pPr marL="0" indent="0">
               <a:buNone/>
             </a:pPr>
             <a:r>
@@ -8124,7 +7922,7 @@
           <a:bodyPr wrap="square" lIns="0" tIns="0" rIns="0" bIns="0" rtlCol="0" anchor="ctr"/>
           <a:lstStyle/>
           <a:p>
-            <a:pPr indent="0" marL="0">
+            <a:pPr marL="0" indent="0">
               <a:buNone/>
             </a:pPr>
             <a:r>
@@ -8165,7 +7963,7 @@
           </a:bodyPr>
           <a:lstStyle/>
           <a:p>
-            <a:pPr indent="0" marL="0">
+            <a:pPr marL="0" indent="0">
               <a:buNone/>
             </a:pPr>
             <a:r>
@@ -8179,9 +7977,6 @@
               </a:rPr>
               <a:t>• </a:t>
             </a:r>
-            <a:pPr indent="0" marL="0">
-              <a:buNone/>
-            </a:pPr>
             <a:r>
               <a:rPr lang="en-US" sz="1750" dirty="0">
                 <a:solidFill>
@@ -8191,11 +7986,20 @@
                 <a:ea typeface="Aptos" pitchFamily="34" charset="-122"/>
                 <a:cs typeface="Aptos" pitchFamily="34" charset="-120"/>
               </a:rPr>
-              <a:t>The model begins with less imaging energy.</a:t>
-            </a:r>
-            <a:pPr indent="0" marL="0">
-              <a:buNone/>
-            </a:pPr>
+              <a:t>The model begins with less imaging energy.
+</a:t>
+            </a:r>
+            <a:r>
+              <a:rPr lang="en-US" sz="1750" b="1" dirty="0">
+                <a:solidFill>
+                  <a:srgbClr val="2F80A6"/>
+                </a:solidFill>
+                <a:latin typeface="Aptos" pitchFamily="34" charset="0"/>
+                <a:ea typeface="Aptos" pitchFamily="34" charset="-122"/>
+                <a:cs typeface="Aptos" pitchFamily="34" charset="-120"/>
+              </a:rPr>
+              <a:t>• </a:t>
+            </a:r>
             <a:r>
               <a:rPr lang="en-US" sz="1750" dirty="0">
                 <a:solidFill>
@@ -8205,12 +8009,9 @@
                 <a:ea typeface="Aptos" pitchFamily="34" charset="-122"/>
                 <a:cs typeface="Aptos" pitchFamily="34" charset="-120"/>
               </a:rPr>
-              <a:t>
+              <a:t>Early training outputs can be smoother and more stable.
 </a:t>
             </a:r>
-            <a:pPr indent="0" marL="0">
-              <a:buNone/>
-            </a:pPr>
             <a:r>
               <a:rPr lang="en-US" sz="1750" b="1" dirty="0">
                 <a:solidFill>
@@ -8222,52 +8023,6 @@
               </a:rPr>
               <a:t>• </a:t>
             </a:r>
-            <a:pPr indent="0" marL="0">
-              <a:buNone/>
-            </a:pPr>
-            <a:r>
-              <a:rPr lang="en-US" sz="1750" dirty="0">
-                <a:solidFill>
-                  <a:srgbClr val="1E293B"/>
-                </a:solidFill>
-                <a:latin typeface="Aptos" pitchFamily="34" charset="0"/>
-                <a:ea typeface="Aptos" pitchFamily="34" charset="-122"/>
-                <a:cs typeface="Aptos" pitchFamily="34" charset="-120"/>
-              </a:rPr>
-              <a:t>Early training outputs can be smoother and more stable.</a:t>
-            </a:r>
-            <a:pPr indent="0" marL="0">
-              <a:buNone/>
-            </a:pPr>
-            <a:r>
-              <a:rPr lang="en-US" sz="1750" dirty="0">
-                <a:solidFill>
-                  <a:srgbClr val="1E293B"/>
-                </a:solidFill>
-                <a:latin typeface="Aptos" pitchFamily="34" charset="0"/>
-                <a:ea typeface="Aptos" pitchFamily="34" charset="-122"/>
-                <a:cs typeface="Aptos" pitchFamily="34" charset="-120"/>
-              </a:rPr>
-              <a:t>
-</a:t>
-            </a:r>
-            <a:pPr indent="0" marL="0">
-              <a:buNone/>
-            </a:pPr>
-            <a:r>
-              <a:rPr lang="en-US" sz="1750" b="1" dirty="0">
-                <a:solidFill>
-                  <a:srgbClr val="2F80A6"/>
-                </a:solidFill>
-                <a:latin typeface="Aptos" pitchFamily="34" charset="0"/>
-                <a:ea typeface="Aptos" pitchFamily="34" charset="-122"/>
-                <a:cs typeface="Aptos" pitchFamily="34" charset="-120"/>
-              </a:rPr>
-              <a:t>• </a:t>
-            </a:r>
-            <a:pPr indent="0" marL="0">
-              <a:buNone/>
-            </a:pPr>
             <a:r>
               <a:rPr lang="en-US" sz="1750" dirty="0">
                 <a:solidFill>
@@ -8303,7 +8058,7 @@
           </a:prstGeom>
           <a:extLst>
             <a:ext uri="{C572A759-6A51-4108-AA02-DFA0A04FC94B}">
-              <ma14:wrappingTextBoxFlag xmlns:ma14="http://schemas.microsoft.com/office/mac/drawingml/2011/main" val="0"/>
+              <ma14:wrappingTextBoxFlag xmlns:ma14="http://schemas.microsoft.com/office/mac/drawingml/2011/main" xmlns="" val="0"/>
             </a:ext>
           </a:extLst>
         </p:spPr>
@@ -8324,7 +8079,7 @@
           <a:p>
             <a:pPr algn="r"/>
             <a:fld id="{F7021451-1387-4CA6-816F-3879F97B5CBC}" type="slidenum">
-              <a:rPr b="0" lang="en-US"/>
+              <a:rPr lang="en-US" b="0"/>
               <a:t>19</a:t>
             </a:fld>
             <a:endParaRPr lang="en-US"/>
@@ -8377,7 +8132,7 @@
           <a:bodyPr wrap="square" lIns="0" tIns="0" rIns="0" bIns="0" rtlCol="0" anchor="ctr"/>
           <a:lstStyle/>
           <a:p>
-            <a:pPr indent="0" marL="0">
+            <a:pPr marL="0" indent="0">
               <a:buNone/>
             </a:pPr>
             <a:r>
@@ -8418,7 +8173,7 @@
           </a:bodyPr>
           <a:lstStyle/>
           <a:p>
-            <a:pPr indent="0" marL="0">
+            <a:pPr marL="0" indent="0">
               <a:buNone/>
             </a:pPr>
             <a:r>
@@ -8459,7 +8214,7 @@
           </a:bodyPr>
           <a:lstStyle/>
           <a:p>
-            <a:pPr indent="0" marL="0">
+            <a:pPr marL="0" indent="0">
               <a:buNone/>
             </a:pPr>
             <a:r>
@@ -8500,7 +8255,7 @@
           </a:bodyPr>
           <a:lstStyle/>
           <a:p>
-            <a:pPr indent="0" marL="0">
+            <a:pPr marL="0" indent="0">
               <a:buNone/>
             </a:pPr>
             <a:r>
@@ -8514,9 +8269,6 @@
               </a:rPr>
               <a:t>• </a:t>
             </a:r>
-            <a:pPr indent="0" marL="0">
-              <a:buNone/>
-            </a:pPr>
             <a:r>
               <a:rPr lang="en-US" sz="1900" dirty="0">
                 <a:solidFill>
@@ -8526,11 +8278,20 @@
                 <a:ea typeface="Aptos" pitchFamily="34" charset="-122"/>
                 <a:cs typeface="Aptos" pitchFamily="34" charset="-120"/>
               </a:rPr>
-              <a:t>Construct an upsampled sequence by zero insertion.</a:t>
-            </a:r>
-            <a:pPr indent="0" marL="0">
-              <a:buNone/>
-            </a:pPr>
+              <a:t>Construct an upsampled sequence by zero insertion.
+</a:t>
+            </a:r>
+            <a:r>
+              <a:rPr lang="en-US" sz="1900" b="1" dirty="0">
+                <a:solidFill>
+                  <a:srgbClr val="2F80A6"/>
+                </a:solidFill>
+                <a:latin typeface="Aptos" pitchFamily="34" charset="0"/>
+                <a:ea typeface="Aptos" pitchFamily="34" charset="-122"/>
+                <a:cs typeface="Aptos" pitchFamily="34" charset="-120"/>
+              </a:rPr>
+              <a:t>• </a:t>
+            </a:r>
             <a:r>
               <a:rPr lang="en-US" sz="1900" dirty="0">
                 <a:solidFill>
@@ -8540,12 +8301,9 @@
                 <a:ea typeface="Aptos" pitchFamily="34" charset="-122"/>
                 <a:cs typeface="Aptos" pitchFamily="34" charset="-120"/>
               </a:rPr>
-              <a:t>
+              <a:t>Explain why the DTFT becomes X(e^{jωL}) and why spectral images appear.
 </a:t>
             </a:r>
-            <a:pPr indent="0" marL="0">
-              <a:buNone/>
-            </a:pPr>
             <a:r>
               <a:rPr lang="en-US" sz="1900" b="1" dirty="0">
                 <a:solidFill>
@@ -8557,9 +8315,6 @@
               </a:rPr>
               <a:t>• </a:t>
             </a:r>
-            <a:pPr indent="0" marL="0">
-              <a:buNone/>
-            </a:pPr>
             <a:r>
               <a:rPr lang="en-US" sz="1900" dirty="0">
                 <a:solidFill>
@@ -8569,11 +8324,20 @@
                 <a:ea typeface="Aptos" pitchFamily="34" charset="-122"/>
                 <a:cs typeface="Aptos" pitchFamily="34" charset="-120"/>
               </a:rPr>
-              <a:t>Explain why the DTFT becomes X(e^{jωL}) and why spectral images appear.</a:t>
-            </a:r>
-            <a:pPr indent="0" marL="0">
-              <a:buNone/>
-            </a:pPr>
+              <a:t>Choose and scale an interpolation lowpass filter.
+</a:t>
+            </a:r>
+            <a:r>
+              <a:rPr lang="en-US" sz="1900" b="1" dirty="0">
+                <a:solidFill>
+                  <a:srgbClr val="2F80A6"/>
+                </a:solidFill>
+                <a:latin typeface="Aptos" pitchFamily="34" charset="0"/>
+                <a:ea typeface="Aptos" pitchFamily="34" charset="-122"/>
+                <a:cs typeface="Aptos" pitchFamily="34" charset="-120"/>
+              </a:rPr>
+              <a:t>• </a:t>
+            </a:r>
             <a:r>
               <a:rPr lang="en-US" sz="1900" dirty="0">
                 <a:solidFill>
@@ -8583,12 +8347,9 @@
                 <a:ea typeface="Aptos" pitchFamily="34" charset="-122"/>
                 <a:cs typeface="Aptos" pitchFamily="34" charset="-120"/>
               </a:rPr>
-              <a:t>
+              <a:t>Build an L/M rational rate converter and select its cutoff.
 </a:t>
             </a:r>
-            <a:pPr indent="0" marL="0">
-              <a:buNone/>
-            </a:pPr>
             <a:r>
               <a:rPr lang="en-US" sz="1900" b="1" dirty="0">
                 <a:solidFill>
@@ -8600,95 +8361,6 @@
               </a:rPr>
               <a:t>• </a:t>
             </a:r>
-            <a:pPr indent="0" marL="0">
-              <a:buNone/>
-            </a:pPr>
-            <a:r>
-              <a:rPr lang="en-US" sz="1900" dirty="0">
-                <a:solidFill>
-                  <a:srgbClr val="1E293B"/>
-                </a:solidFill>
-                <a:latin typeface="Aptos" pitchFamily="34" charset="0"/>
-                <a:ea typeface="Aptos" pitchFamily="34" charset="-122"/>
-                <a:cs typeface="Aptos" pitchFamily="34" charset="-120"/>
-              </a:rPr>
-              <a:t>Choose and scale an interpolation lowpass filter.</a:t>
-            </a:r>
-            <a:pPr indent="0" marL="0">
-              <a:buNone/>
-            </a:pPr>
-            <a:r>
-              <a:rPr lang="en-US" sz="1900" dirty="0">
-                <a:solidFill>
-                  <a:srgbClr val="1E293B"/>
-                </a:solidFill>
-                <a:latin typeface="Aptos" pitchFamily="34" charset="0"/>
-                <a:ea typeface="Aptos" pitchFamily="34" charset="-122"/>
-                <a:cs typeface="Aptos" pitchFamily="34" charset="-120"/>
-              </a:rPr>
-              <a:t>
-</a:t>
-            </a:r>
-            <a:pPr indent="0" marL="0">
-              <a:buNone/>
-            </a:pPr>
-            <a:r>
-              <a:rPr lang="en-US" sz="1900" b="1" dirty="0">
-                <a:solidFill>
-                  <a:srgbClr val="2F80A6"/>
-                </a:solidFill>
-                <a:latin typeface="Aptos" pitchFamily="34" charset="0"/>
-                <a:ea typeface="Aptos" pitchFamily="34" charset="-122"/>
-                <a:cs typeface="Aptos" pitchFamily="34" charset="-120"/>
-              </a:rPr>
-              <a:t>• </a:t>
-            </a:r>
-            <a:pPr indent="0" marL="0">
-              <a:buNone/>
-            </a:pPr>
-            <a:r>
-              <a:rPr lang="en-US" sz="1900" dirty="0">
-                <a:solidFill>
-                  <a:srgbClr val="1E293B"/>
-                </a:solidFill>
-                <a:latin typeface="Aptos" pitchFamily="34" charset="0"/>
-                <a:ea typeface="Aptos" pitchFamily="34" charset="-122"/>
-                <a:cs typeface="Aptos" pitchFamily="34" charset="-120"/>
-              </a:rPr>
-              <a:t>Build an L/M rational rate converter and select its cutoff.</a:t>
-            </a:r>
-            <a:pPr indent="0" marL="0">
-              <a:buNone/>
-            </a:pPr>
-            <a:r>
-              <a:rPr lang="en-US" sz="1900" dirty="0">
-                <a:solidFill>
-                  <a:srgbClr val="1E293B"/>
-                </a:solidFill>
-                <a:latin typeface="Aptos" pitchFamily="34" charset="0"/>
-                <a:ea typeface="Aptos" pitchFamily="34" charset="-122"/>
-                <a:cs typeface="Aptos" pitchFamily="34" charset="-120"/>
-              </a:rPr>
-              <a:t>
-</a:t>
-            </a:r>
-            <a:pPr indent="0" marL="0">
-              <a:buNone/>
-            </a:pPr>
-            <a:r>
-              <a:rPr lang="en-US" sz="1900" b="1" dirty="0">
-                <a:solidFill>
-                  <a:srgbClr val="2F80A6"/>
-                </a:solidFill>
-                <a:latin typeface="Aptos" pitchFamily="34" charset="0"/>
-                <a:ea typeface="Aptos" pitchFamily="34" charset="-122"/>
-                <a:cs typeface="Aptos" pitchFamily="34" charset="-120"/>
-              </a:rPr>
-              <a:t>• </a:t>
-            </a:r>
-            <a:pPr indent="0" marL="0">
-              <a:buNone/>
-            </a:pPr>
             <a:r>
               <a:rPr lang="en-US" sz="1900" dirty="0">
                 <a:solidFill>
@@ -8730,13 +8402,20 @@
             <a:prstDash val="solid"/>
           </a:ln>
           <a:effectLst>
-            <a:outerShdw sx="100000" sy="100000" kx="0" ky="0" algn="bl" rotWithShape="0" blurRad="16510" dist="8890" dir="2700000">
+            <a:outerShdw blurRad="16510" dist="8890" dir="2700000" algn="bl" rotWithShape="0">
               <a:srgbClr val="000000">
                 <a:alpha val="12000"/>
               </a:srgbClr>
             </a:outerShdw>
           </a:effectLst>
         </p:spPr>
+        <p:txBody>
+          <a:bodyPr/>
+          <a:lstStyle/>
+          <a:p>
+            <a:endParaRPr lang="en-US"/>
+          </a:p>
+        </p:txBody>
       </p:sp>
       <p:sp>
         <p:nvSpPr>
@@ -8759,7 +8438,7 @@
           <a:bodyPr wrap="square" lIns="0" tIns="0" rIns="0" bIns="0" rtlCol="0" anchor="ctr"/>
           <a:lstStyle/>
           <a:p>
-            <a:pPr indent="0" marL="0">
+            <a:pPr marL="0" indent="0">
               <a:buNone/>
             </a:pPr>
             <a:r>
@@ -8800,7 +8479,7 @@
           </a:bodyPr>
           <a:lstStyle/>
           <a:p>
-            <a:pPr indent="0" marL="0">
+            <a:pPr marL="0" indent="0">
               <a:buNone/>
             </a:pPr>
             <a:r>
@@ -8817,7 +8496,7 @@
             <a:endParaRPr lang="en-US" sz="1350" dirty="0"/>
           </a:p>
           <a:p>
-            <a:pPr indent="0" marL="0">
+            <a:pPr marL="0" indent="0">
               <a:buNone/>
             </a:pPr>
             <a:r>
@@ -8834,7 +8513,7 @@
             <a:endParaRPr lang="en-US" sz="1350" dirty="0"/>
           </a:p>
           <a:p>
-            <a:pPr indent="0" marL="0">
+            <a:pPr marL="0" indent="0">
               <a:buNone/>
             </a:pPr>
             <a:r>
@@ -8851,7 +8530,7 @@
             <a:endParaRPr lang="en-US" sz="1350" dirty="0"/>
           </a:p>
           <a:p>
-            <a:pPr indent="0" marL="0">
+            <a:pPr marL="0" indent="0">
               <a:buNone/>
             </a:pPr>
             <a:r>
@@ -8895,13 +8574,20 @@
             <a:prstDash val="solid"/>
           </a:ln>
           <a:effectLst>
-            <a:outerShdw sx="100000" sy="100000" kx="0" ky="0" algn="bl" rotWithShape="0" blurRad="16510" dist="8890" dir="2700000">
+            <a:outerShdw blurRad="16510" dist="8890" dir="2700000" algn="bl" rotWithShape="0">
               <a:srgbClr val="000000">
                 <a:alpha val="12000"/>
               </a:srgbClr>
             </a:outerShdw>
           </a:effectLst>
         </p:spPr>
+        <p:txBody>
+          <a:bodyPr/>
+          <a:lstStyle/>
+          <a:p>
+            <a:endParaRPr lang="en-US"/>
+          </a:p>
+        </p:txBody>
       </p:sp>
       <p:sp>
         <p:nvSpPr>
@@ -8924,7 +8610,7 @@
           <a:bodyPr wrap="square" lIns="0" tIns="0" rIns="0" bIns="0" rtlCol="0" anchor="ctr"/>
           <a:lstStyle/>
           <a:p>
-            <a:pPr indent="0" marL="0">
+            <a:pPr marL="0" indent="0">
               <a:buNone/>
             </a:pPr>
             <a:r>
@@ -8965,7 +8651,7 @@
           </a:bodyPr>
           <a:lstStyle/>
           <a:p>
-            <a:pPr indent="0" marL="0">
+            <a:pPr marL="0" indent="0">
               <a:buNone/>
             </a:pPr>
             <a:r>
@@ -9003,7 +8689,7 @@
           </a:prstGeom>
           <a:extLst>
             <a:ext uri="{C572A759-6A51-4108-AA02-DFA0A04FC94B}">
-              <ma14:wrappingTextBoxFlag xmlns:ma14="http://schemas.microsoft.com/office/mac/drawingml/2011/main" val="0"/>
+              <ma14:wrappingTextBoxFlag xmlns:ma14="http://schemas.microsoft.com/office/mac/drawingml/2011/main" xmlns="" val="0"/>
             </a:ext>
           </a:extLst>
         </p:spPr>
@@ -9024,7 +8710,7 @@
           <a:p>
             <a:pPr algn="r"/>
             <a:fld id="{F7021451-1387-4CA6-816F-3879F97B5CBC}" type="slidenum">
-              <a:rPr b="0" lang="en-US"/>
+              <a:rPr lang="en-US" b="0"/>
               <a:t>2</a:t>
             </a:fld>
             <a:endParaRPr lang="en-US"/>
@@ -9077,7 +8763,7 @@
           <a:bodyPr wrap="square" lIns="0" tIns="0" rIns="0" bIns="0" rtlCol="0" anchor="ctr"/>
           <a:lstStyle/>
           <a:p>
-            <a:pPr indent="0" marL="0">
+            <a:pPr marL="0" indent="0">
               <a:buNone/>
             </a:pPr>
             <a:r>
@@ -9118,7 +8804,7 @@
           </a:bodyPr>
           <a:lstStyle/>
           <a:p>
-            <a:pPr indent="0" marL="0">
+            <a:pPr marL="0" indent="0">
               <a:buNone/>
             </a:pPr>
             <a:r>
@@ -9159,7 +8845,7 @@
           </a:bodyPr>
           <a:lstStyle/>
           <a:p>
-            <a:pPr indent="0" marL="0">
+            <a:pPr marL="0" indent="0">
               <a:buNone/>
             </a:pPr>
             <a:r>
@@ -9173,9 +8859,6 @@
               </a:rPr>
               <a:t>• </a:t>
             </a:r>
-            <a:pPr indent="0" marL="0">
-              <a:buNone/>
-            </a:pPr>
             <a:r>
               <a:rPr lang="en-US" sz="1950" b="1" dirty="0">
                 <a:solidFill>
@@ -9187,9 +8870,6 @@
               </a:rPr>
               <a:t>Upsampling</a:t>
             </a:r>
-            <a:pPr indent="0" marL="0">
-              <a:buNone/>
-            </a:pPr>
             <a:r>
               <a:rPr lang="en-US" sz="1950" dirty="0">
                 <a:solidFill>
@@ -9199,11 +8879,31 @@
                 <a:ea typeface="Aptos" pitchFamily="34" charset="-122"/>
                 <a:cs typeface="Aptos" pitchFamily="34" charset="-120"/>
               </a:rPr>
-              <a:t> inserts zeros and creates spectral images.</a:t>
-            </a:r>
-            <a:pPr indent="0" marL="0">
-              <a:buNone/>
-            </a:pPr>
+              <a:t> inserts zeros and creates spectral images.
+</a:t>
+            </a:r>
+            <a:r>
+              <a:rPr lang="en-US" sz="1950" b="1" dirty="0">
+                <a:solidFill>
+                  <a:srgbClr val="2F80A6"/>
+                </a:solidFill>
+                <a:latin typeface="Aptos" pitchFamily="34" charset="0"/>
+                <a:ea typeface="Aptos" pitchFamily="34" charset="-122"/>
+                <a:cs typeface="Aptos" pitchFamily="34" charset="-120"/>
+              </a:rPr>
+              <a:t>• </a:t>
+            </a:r>
+            <a:r>
+              <a:rPr lang="en-US" sz="1950" b="1" dirty="0">
+                <a:solidFill>
+                  <a:srgbClr val="1E293B"/>
+                </a:solidFill>
+                <a:latin typeface="Aptos" pitchFamily="34" charset="0"/>
+                <a:ea typeface="Aptos" pitchFamily="34" charset="-122"/>
+                <a:cs typeface="Aptos" pitchFamily="34" charset="-120"/>
+              </a:rPr>
+              <a:t>Interpolation</a:t>
+            </a:r>
             <a:r>
               <a:rPr lang="en-US" sz="1950" dirty="0">
                 <a:solidFill>
@@ -9213,12 +8913,9 @@
                 <a:ea typeface="Aptos" pitchFamily="34" charset="-122"/>
                 <a:cs typeface="Aptos" pitchFamily="34" charset="-120"/>
               </a:rPr>
-              <a:t>
+              <a:t> lowpass filters those images and uses gain L.
 </a:t>
             </a:r>
-            <a:pPr indent="0" marL="0">
-              <a:buNone/>
-            </a:pPr>
             <a:r>
               <a:rPr lang="en-US" sz="1950" b="1" dirty="0">
                 <a:solidFill>
@@ -9230,9 +8927,6 @@
               </a:rPr>
               <a:t>• </a:t>
             </a:r>
-            <a:pPr indent="0" marL="0">
-              <a:buNone/>
-            </a:pPr>
             <a:r>
               <a:rPr lang="en-US" sz="1950" b="1" dirty="0">
                 <a:solidFill>
@@ -9242,11 +8936,8 @@
                 <a:ea typeface="Aptos" pitchFamily="34" charset="-122"/>
                 <a:cs typeface="Aptos" pitchFamily="34" charset="-120"/>
               </a:rPr>
-              <a:t>Interpolation</a:t>
-            </a:r>
-            <a:pPr indent="0" marL="0">
-              <a:buNone/>
-            </a:pPr>
+              <a:t>Rational conversion</a:t>
+            </a:r>
             <a:r>
               <a:rPr lang="en-US" sz="1950" dirty="0">
                 <a:solidFill>
@@ -9256,11 +8947,31 @@
                 <a:ea typeface="Aptos" pitchFamily="34" charset="-122"/>
                 <a:cs typeface="Aptos" pitchFamily="34" charset="-120"/>
               </a:rPr>
-              <a:t> lowpass filters those images and uses gain L.</a:t>
-            </a:r>
-            <a:pPr indent="0" marL="0">
-              <a:buNone/>
-            </a:pPr>
+              <a:t> uses ↑L → LPF → ↓M with cutoff min(π/L, π/M).
+</a:t>
+            </a:r>
+            <a:r>
+              <a:rPr lang="en-US" sz="1950" b="1" dirty="0">
+                <a:solidFill>
+                  <a:srgbClr val="2F80A6"/>
+                </a:solidFill>
+                <a:latin typeface="Aptos" pitchFamily="34" charset="0"/>
+                <a:ea typeface="Aptos" pitchFamily="34" charset="-122"/>
+                <a:cs typeface="Aptos" pitchFamily="34" charset="-120"/>
+              </a:rPr>
+              <a:t>• </a:t>
+            </a:r>
+            <a:r>
+              <a:rPr lang="en-US" sz="1950" b="1" dirty="0">
+                <a:solidFill>
+                  <a:srgbClr val="1E293B"/>
+                </a:solidFill>
+                <a:latin typeface="Aptos" pitchFamily="34" charset="0"/>
+                <a:ea typeface="Aptos" pitchFamily="34" charset="-122"/>
+                <a:cs typeface="Aptos" pitchFamily="34" charset="-120"/>
+              </a:rPr>
+              <a:t>ConvTranspose1d</a:t>
+            </a:r>
             <a:r>
               <a:rPr lang="en-US" sz="1950" dirty="0">
                 <a:solidFill>
@@ -9270,12 +8981,9 @@
                 <a:ea typeface="Aptos" pitchFamily="34" charset="-122"/>
                 <a:cs typeface="Aptos" pitchFamily="34" charset="-120"/>
               </a:rPr>
-              <a:t>
+              <a:t> is closely related to zero insertion + learned filtering.
 </a:t>
             </a:r>
-            <a:pPr indent="0" marL="0">
-              <a:buNone/>
-            </a:pPr>
             <a:r>
               <a:rPr lang="en-US" sz="1950" b="1" dirty="0">
                 <a:solidFill>
@@ -9287,9 +8995,6 @@
               </a:rPr>
               <a:t>• </a:t>
             </a:r>
-            <a:pPr indent="0" marL="0">
-              <a:buNone/>
-            </a:pPr>
             <a:r>
               <a:rPr lang="en-US" sz="1950" b="1" dirty="0">
                 <a:solidFill>
@@ -9299,125 +9004,8 @@
                 <a:ea typeface="Aptos" pitchFamily="34" charset="-122"/>
                 <a:cs typeface="Aptos" pitchFamily="34" charset="-120"/>
               </a:rPr>
-              <a:t>Rational conversion</a:t>
-            </a:r>
-            <a:pPr indent="0" marL="0">
-              <a:buNone/>
-            </a:pPr>
-            <a:r>
-              <a:rPr lang="en-US" sz="1950" dirty="0">
-                <a:solidFill>
-                  <a:srgbClr val="1E293B"/>
-                </a:solidFill>
-                <a:latin typeface="Aptos" pitchFamily="34" charset="0"/>
-                <a:ea typeface="Aptos" pitchFamily="34" charset="-122"/>
-                <a:cs typeface="Aptos" pitchFamily="34" charset="-120"/>
-              </a:rPr>
-              <a:t> uses ↑L → LPF → ↓M with cutoff min(π/L, π/M).</a:t>
-            </a:r>
-            <a:pPr indent="0" marL="0">
-              <a:buNone/>
-            </a:pPr>
-            <a:r>
-              <a:rPr lang="en-US" sz="1950" dirty="0">
-                <a:solidFill>
-                  <a:srgbClr val="1E293B"/>
-                </a:solidFill>
-                <a:latin typeface="Aptos" pitchFamily="34" charset="0"/>
-                <a:ea typeface="Aptos" pitchFamily="34" charset="-122"/>
-                <a:cs typeface="Aptos" pitchFamily="34" charset="-120"/>
-              </a:rPr>
-              <a:t>
-</a:t>
-            </a:r>
-            <a:pPr indent="0" marL="0">
-              <a:buNone/>
-            </a:pPr>
-            <a:r>
-              <a:rPr lang="en-US" sz="1950" b="1" dirty="0">
-                <a:solidFill>
-                  <a:srgbClr val="2F80A6"/>
-                </a:solidFill>
-                <a:latin typeface="Aptos" pitchFamily="34" charset="0"/>
-                <a:ea typeface="Aptos" pitchFamily="34" charset="-122"/>
-                <a:cs typeface="Aptos" pitchFamily="34" charset="-120"/>
-              </a:rPr>
-              <a:t>• </a:t>
-            </a:r>
-            <a:pPr indent="0" marL="0">
-              <a:buNone/>
-            </a:pPr>
-            <a:r>
-              <a:rPr lang="en-US" sz="1950" b="1" dirty="0">
-                <a:solidFill>
-                  <a:srgbClr val="1E293B"/>
-                </a:solidFill>
-                <a:latin typeface="Aptos" pitchFamily="34" charset="0"/>
-                <a:ea typeface="Aptos" pitchFamily="34" charset="-122"/>
-                <a:cs typeface="Aptos" pitchFamily="34" charset="-120"/>
-              </a:rPr>
-              <a:t>ConvTranspose1d</a:t>
-            </a:r>
-            <a:pPr indent="0" marL="0">
-              <a:buNone/>
-            </a:pPr>
-            <a:r>
-              <a:rPr lang="en-US" sz="1950" dirty="0">
-                <a:solidFill>
-                  <a:srgbClr val="1E293B"/>
-                </a:solidFill>
-                <a:latin typeface="Aptos" pitchFamily="34" charset="0"/>
-                <a:ea typeface="Aptos" pitchFamily="34" charset="-122"/>
-                <a:cs typeface="Aptos" pitchFamily="34" charset="-120"/>
-              </a:rPr>
-              <a:t> is closely related to zero insertion + learned filtering.</a:t>
-            </a:r>
-            <a:pPr indent="0" marL="0">
-              <a:buNone/>
-            </a:pPr>
-            <a:r>
-              <a:rPr lang="en-US" sz="1950" dirty="0">
-                <a:solidFill>
-                  <a:srgbClr val="1E293B"/>
-                </a:solidFill>
-                <a:latin typeface="Aptos" pitchFamily="34" charset="0"/>
-                <a:ea typeface="Aptos" pitchFamily="34" charset="-122"/>
-                <a:cs typeface="Aptos" pitchFamily="34" charset="-120"/>
-              </a:rPr>
-              <a:t>
-</a:t>
-            </a:r>
-            <a:pPr indent="0" marL="0">
-              <a:buNone/>
-            </a:pPr>
-            <a:r>
-              <a:rPr lang="en-US" sz="1950" b="1" dirty="0">
-                <a:solidFill>
-                  <a:srgbClr val="2F80A6"/>
-                </a:solidFill>
-                <a:latin typeface="Aptos" pitchFamily="34" charset="0"/>
-                <a:ea typeface="Aptos" pitchFamily="34" charset="-122"/>
-                <a:cs typeface="Aptos" pitchFamily="34" charset="-120"/>
-              </a:rPr>
-              <a:t>• </a:t>
-            </a:r>
-            <a:pPr indent="0" marL="0">
-              <a:buNone/>
-            </a:pPr>
-            <a:r>
-              <a:rPr lang="en-US" sz="1950" b="1" dirty="0">
-                <a:solidFill>
-                  <a:srgbClr val="1E293B"/>
-                </a:solidFill>
-                <a:latin typeface="Aptos" pitchFamily="34" charset="0"/>
-                <a:ea typeface="Aptos" pitchFamily="34" charset="-122"/>
-                <a:cs typeface="Aptos" pitchFamily="34" charset="-120"/>
-              </a:rPr>
               <a:t>DSP insight</a:t>
             </a:r>
-            <a:pPr indent="0" marL="0">
-              <a:buNone/>
-            </a:pPr>
             <a:r>
               <a:rPr lang="en-US" sz="1950" dirty="0">
                 <a:solidFill>
@@ -9459,13 +9047,20 @@
             <a:prstDash val="solid"/>
           </a:ln>
           <a:effectLst>
-            <a:outerShdw sx="100000" sy="100000" kx="0" ky="0" algn="bl" rotWithShape="0" blurRad="16510" dist="8890" dir="2700000">
+            <a:outerShdw blurRad="16510" dist="8890" dir="2700000" algn="bl" rotWithShape="0">
               <a:srgbClr val="000000">
                 <a:alpha val="12000"/>
               </a:srgbClr>
             </a:outerShdw>
           </a:effectLst>
         </p:spPr>
+        <p:txBody>
+          <a:bodyPr/>
+          <a:lstStyle/>
+          <a:p>
+            <a:endParaRPr lang="en-US"/>
+          </a:p>
+        </p:txBody>
       </p:sp>
       <p:sp>
         <p:nvSpPr>
@@ -9488,7 +9083,7 @@
           <a:bodyPr wrap="square" lIns="0" tIns="0" rIns="0" bIns="0" rtlCol="0" anchor="ctr"/>
           <a:lstStyle/>
           <a:p>
-            <a:pPr indent="0" marL="0">
+            <a:pPr marL="0" indent="0">
               <a:buNone/>
             </a:pPr>
             <a:r>
@@ -9529,7 +9124,7 @@
           </a:bodyPr>
           <a:lstStyle/>
           <a:p>
-            <a:pPr indent="0" marL="0">
+            <a:pPr marL="0" indent="0">
               <a:buNone/>
             </a:pPr>
             <a:r>
@@ -9573,13 +9168,20 @@
             <a:prstDash val="solid"/>
           </a:ln>
           <a:effectLst>
-            <a:outerShdw sx="100000" sy="100000" kx="0" ky="0" algn="bl" rotWithShape="0" blurRad="16510" dist="8890" dir="2700000">
+            <a:outerShdw blurRad="16510" dist="8890" dir="2700000" algn="bl" rotWithShape="0">
               <a:srgbClr val="000000">
                 <a:alpha val="12000"/>
               </a:srgbClr>
             </a:outerShdw>
           </a:effectLst>
         </p:spPr>
+        <p:txBody>
+          <a:bodyPr/>
+          <a:lstStyle/>
+          <a:p>
+            <a:endParaRPr lang="en-US"/>
+          </a:p>
+        </p:txBody>
       </p:sp>
       <p:sp>
         <p:nvSpPr>
@@ -9602,7 +9204,7 @@
           <a:bodyPr wrap="square" lIns="0" tIns="0" rIns="0" bIns="0" rtlCol="0" anchor="ctr"/>
           <a:lstStyle/>
           <a:p>
-            <a:pPr indent="0" marL="0">
+            <a:pPr marL="0" indent="0">
               <a:buNone/>
             </a:pPr>
             <a:r>
@@ -9643,7 +9245,7 @@
           </a:bodyPr>
           <a:lstStyle/>
           <a:p>
-            <a:pPr indent="0" marL="0">
+            <a:pPr marL="0" indent="0">
               <a:buNone/>
             </a:pPr>
             <a:r>
@@ -9681,7 +9283,7 @@
           </a:prstGeom>
           <a:extLst>
             <a:ext uri="{C572A759-6A51-4108-AA02-DFA0A04FC94B}">
-              <ma14:wrappingTextBoxFlag xmlns:ma14="http://schemas.microsoft.com/office/mac/drawingml/2011/main" val="0"/>
+              <ma14:wrappingTextBoxFlag xmlns:ma14="http://schemas.microsoft.com/office/mac/drawingml/2011/main" xmlns="" val="0"/>
             </a:ext>
           </a:extLst>
         </p:spPr>
@@ -9702,7 +9304,7 @@
           <a:p>
             <a:pPr algn="r"/>
             <a:fld id="{F7021451-1387-4CA6-816F-3879F97B5CBC}" type="slidenum">
-              <a:rPr b="0" lang="en-US"/>
+              <a:rPr lang="en-US" b="0"/>
               <a:t>20</a:t>
             </a:fld>
             <a:endParaRPr lang="en-US"/>
@@ -9755,7 +9357,7 @@
           <a:bodyPr wrap="square" lIns="0" tIns="0" rIns="0" bIns="0" rtlCol="0" anchor="ctr"/>
           <a:lstStyle/>
           <a:p>
-            <a:pPr indent="0" marL="0">
+            <a:pPr marL="0" indent="0">
               <a:buNone/>
             </a:pPr>
             <a:r>
@@ -9796,7 +9398,7 @@
           </a:bodyPr>
           <a:lstStyle/>
           <a:p>
-            <a:pPr indent="0" marL="0">
+            <a:pPr marL="0" indent="0">
               <a:buNone/>
             </a:pPr>
             <a:r>
@@ -9837,7 +9439,7 @@
           </a:bodyPr>
           <a:lstStyle/>
           <a:p>
-            <a:pPr indent="0" marL="0">
+            <a:pPr marL="0" indent="0">
               <a:buNone/>
             </a:pPr>
             <a:r>
@@ -9851,9 +9453,6 @@
               </a:rPr>
               <a:t>• </a:t>
             </a:r>
-            <a:pPr indent="0" marL="0">
-              <a:buNone/>
-            </a:pPr>
             <a:r>
               <a:rPr lang="en-US" sz="1800" dirty="0">
                 <a:solidFill>
@@ -9863,11 +9462,20 @@
                 <a:ea typeface="Aptos" pitchFamily="34" charset="-122"/>
                 <a:cs typeface="Aptos" pitchFamily="34" charset="-120"/>
               </a:rPr>
-              <a:t>Oppenheim &amp; Schafer, Discrete-Time Signal Processing, §4.6: sampling-rate conversion.</a:t>
-            </a:r>
-            <a:pPr indent="0" marL="0">
-              <a:buNone/>
-            </a:pPr>
+              <a:t>Oppenheim &amp; Schafer, Discrete-Time Signal Processing, §4.6: sampling-rate conversion.
+</a:t>
+            </a:r>
+            <a:r>
+              <a:rPr lang="en-US" sz="1800" b="1" dirty="0">
+                <a:solidFill>
+                  <a:srgbClr val="2F80A6"/>
+                </a:solidFill>
+                <a:latin typeface="Aptos" pitchFamily="34" charset="0"/>
+                <a:ea typeface="Aptos" pitchFamily="34" charset="-122"/>
+                <a:cs typeface="Aptos" pitchFamily="34" charset="-120"/>
+              </a:rPr>
+              <a:t>• </a:t>
+            </a:r>
             <a:r>
               <a:rPr lang="en-US" sz="1800" dirty="0">
                 <a:solidFill>
@@ -9877,12 +9485,9 @@
                 <a:ea typeface="Aptos" pitchFamily="34" charset="-122"/>
                 <a:cs typeface="Aptos" pitchFamily="34" charset="-120"/>
               </a:rPr>
-              <a:t>
+              <a:t>Raschka et al., Machine Learning with PyTorch and Scikit-Learn: convolutional network architectures.
 </a:t>
             </a:r>
-            <a:pPr indent="0" marL="0">
-              <a:buNone/>
-            </a:pPr>
             <a:r>
               <a:rPr lang="en-US" sz="1800" b="1" dirty="0">
                 <a:solidFill>
@@ -9894,9 +9499,6 @@
               </a:rPr>
               <a:t>• </a:t>
             </a:r>
-            <a:pPr indent="0" marL="0">
-              <a:buNone/>
-            </a:pPr>
             <a:r>
               <a:rPr lang="en-US" sz="1800" dirty="0">
                 <a:solidFill>
@@ -9906,26 +9508,9 @@
                 <a:ea typeface="Aptos" pitchFamily="34" charset="-122"/>
                 <a:cs typeface="Aptos" pitchFamily="34" charset="-120"/>
               </a:rPr>
-              <a:t>Raschka et al., Machine Learning with PyTorch and Scikit-Learn: convolutional network architectures.</a:t>
-            </a:r>
-            <a:pPr indent="0" marL="0">
-              <a:buNone/>
-            </a:pPr>
-            <a:r>
-              <a:rPr lang="en-US" sz="1800" dirty="0">
-                <a:solidFill>
-                  <a:srgbClr val="1E293B"/>
-                </a:solidFill>
-                <a:latin typeface="Aptos" pitchFamily="34" charset="0"/>
-                <a:ea typeface="Aptos" pitchFamily="34" charset="-122"/>
-                <a:cs typeface="Aptos" pitchFamily="34" charset="-120"/>
-              </a:rPr>
-              <a:t>
+              <a:t>Accompanying notebook: Week6_Multirate_DSP_and_ML_Demos.ipynb.
 </a:t>
             </a:r>
-            <a:pPr indent="0" marL="0">
-              <a:buNone/>
-            </a:pPr>
             <a:r>
               <a:rPr lang="en-US" sz="1800" b="1" dirty="0">
                 <a:solidFill>
@@ -9937,52 +9522,6 @@
               </a:rPr>
               <a:t>• </a:t>
             </a:r>
-            <a:pPr indent="0" marL="0">
-              <a:buNone/>
-            </a:pPr>
-            <a:r>
-              <a:rPr lang="en-US" sz="1800" dirty="0">
-                <a:solidFill>
-                  <a:srgbClr val="1E293B"/>
-                </a:solidFill>
-                <a:latin typeface="Aptos" pitchFamily="34" charset="0"/>
-                <a:ea typeface="Aptos" pitchFamily="34" charset="-122"/>
-                <a:cs typeface="Aptos" pitchFamily="34" charset="-120"/>
-              </a:rPr>
-              <a:t>Accompanying notebook: Week6_Multirate_DSP_and_ML_Demos.ipynb.</a:t>
-            </a:r>
-            <a:pPr indent="0" marL="0">
-              <a:buNone/>
-            </a:pPr>
-            <a:r>
-              <a:rPr lang="en-US" sz="1800" dirty="0">
-                <a:solidFill>
-                  <a:srgbClr val="1E293B"/>
-                </a:solidFill>
-                <a:latin typeface="Aptos" pitchFamily="34" charset="0"/>
-                <a:ea typeface="Aptos" pitchFamily="34" charset="-122"/>
-                <a:cs typeface="Aptos" pitchFamily="34" charset="-120"/>
-              </a:rPr>
-              <a:t>
-</a:t>
-            </a:r>
-            <a:pPr indent="0" marL="0">
-              <a:buNone/>
-            </a:pPr>
-            <a:r>
-              <a:rPr lang="en-US" sz="1800" b="1" dirty="0">
-                <a:solidFill>
-                  <a:srgbClr val="2F80A6"/>
-                </a:solidFill>
-                <a:latin typeface="Aptos" pitchFamily="34" charset="0"/>
-                <a:ea typeface="Aptos" pitchFamily="34" charset="-122"/>
-                <a:cs typeface="Aptos" pitchFamily="34" charset="-120"/>
-              </a:rPr>
-              <a:t>• </a:t>
-            </a:r>
-            <a:pPr indent="0" marL="0">
-              <a:buNone/>
-            </a:pPr>
             <a:r>
               <a:rPr lang="en-US" sz="1800" dirty="0">
                 <a:solidFill>
@@ -10018,7 +9557,7 @@
           </a:prstGeom>
           <a:extLst>
             <a:ext uri="{C572A759-6A51-4108-AA02-DFA0A04FC94B}">
-              <ma14:wrappingTextBoxFlag xmlns:ma14="http://schemas.microsoft.com/office/mac/drawingml/2011/main" val="0"/>
+              <ma14:wrappingTextBoxFlag xmlns:ma14="http://schemas.microsoft.com/office/mac/drawingml/2011/main" xmlns="" val="0"/>
             </a:ext>
           </a:extLst>
         </p:spPr>
@@ -10039,7 +9578,7 @@
           <a:p>
             <a:pPr algn="r"/>
             <a:fld id="{F7021451-1387-4CA6-816F-3879F97B5CBC}" type="slidenum">
-              <a:rPr b="0" lang="en-US"/>
+              <a:rPr lang="en-US" b="0"/>
               <a:t>21</a:t>
             </a:fld>
             <a:endParaRPr lang="en-US"/>
@@ -10062,6 +9601,7 @@
         <a:solidFill>
           <a:srgbClr val="16324F"/>
         </a:solidFill>
+        <a:effectLst/>
       </p:bgPr>
     </p:bg>
     <p:spTree>
@@ -10099,7 +9639,7 @@
           <a:bodyPr wrap="square" lIns="0" tIns="0" rIns="0" bIns="0" rtlCol="0" anchor="ctr"/>
           <a:lstStyle/>
           <a:p>
-            <a:pPr indent="0" marL="0">
+            <a:pPr marL="0" indent="0">
               <a:buNone/>
             </a:pPr>
             <a:r>
@@ -10140,7 +9680,7 @@
           </a:bodyPr>
           <a:lstStyle/>
           <a:p>
-            <a:pPr indent="0" marL="0">
+            <a:pPr marL="0" indent="0">
               <a:buNone/>
             </a:pPr>
             <a:r>
@@ -10181,7 +9721,7 @@
           </a:bodyPr>
           <a:lstStyle/>
           <a:p>
-            <a:pPr indent="0" marL="0">
+            <a:pPr marL="0" indent="0">
               <a:buNone/>
             </a:pPr>
             <a:r>
@@ -10245,7 +9785,7 @@
           <a:bodyPr wrap="square" lIns="0" tIns="0" rIns="0" bIns="0" rtlCol="0" anchor="ctr"/>
           <a:lstStyle/>
           <a:p>
-            <a:pPr indent="0" marL="0">
+            <a:pPr marL="0" indent="0">
               <a:buNone/>
             </a:pPr>
             <a:r>
@@ -10286,7 +9826,7 @@
           </a:bodyPr>
           <a:lstStyle/>
           <a:p>
-            <a:pPr indent="0" marL="0">
+            <a:pPr marL="0" indent="0">
               <a:buNone/>
             </a:pPr>
             <a:r>
@@ -10306,17 +9846,17 @@
       </p:sp>
       <p:pic>
         <p:nvPicPr>
-          <p:cNvPr id="4" name="Image 0" descr="preencoded.png">    </p:cNvPr>
+          <p:cNvPr id="4" name="Image 0" descr="preencoded.png"/>
           <p:cNvPicPr>
             <a:picLocks noChangeAspect="1"/>
           </p:cNvPicPr>
           <p:nvPr/>
         </p:nvPicPr>
         <p:blipFill>
-          <a:blip r:embed="rId1">
+          <a:blip>
             <a:extLst>
               <a:ext uri="{96DAC541-7B7A-43D3-8B79-37D633B846F1}">
-                <asvg:svgBlip xmlns:asvg="http://schemas.microsoft.com/office/drawing/2016/SVG/main" r:embed="rId2"/>
+                <asvg:svgBlip xmlns:asvg="http://schemas.microsoft.com/office/drawing/2016/SVG/main" r:embed="rId3"/>
               </a:ext>
             </a:extLst>
           </a:blip>
@@ -10357,7 +9897,7 @@
           </a:bodyPr>
           <a:lstStyle/>
           <a:p>
-            <a:pPr indent="0" marL="0">
+            <a:pPr marL="0" indent="0">
               <a:buNone/>
             </a:pPr>
             <a:r>
@@ -10371,9 +9911,6 @@
               </a:rPr>
               <a:t>• </a:t>
             </a:r>
-            <a:pPr indent="0" marL="0">
-              <a:buNone/>
-            </a:pPr>
             <a:r>
               <a:rPr lang="en-US" sz="1770" dirty="0">
                 <a:solidFill>
@@ -10383,11 +9920,20 @@
                 <a:ea typeface="Aptos" pitchFamily="34" charset="-122"/>
                 <a:cs typeface="Aptos" pitchFamily="34" charset="-120"/>
               </a:rPr>
-              <a:t>Output sample rate becomes L F_s.</a:t>
-            </a:r>
-            <a:pPr indent="0" marL="0">
-              <a:buNone/>
-            </a:pPr>
+              <a:t>Output sample rate becomes L F_s.
+</a:t>
+            </a:r>
+            <a:r>
+              <a:rPr lang="en-US" sz="1770" b="1" dirty="0">
+                <a:solidFill>
+                  <a:srgbClr val="2F80A6"/>
+                </a:solidFill>
+                <a:latin typeface="Aptos" pitchFamily="34" charset="0"/>
+                <a:ea typeface="Aptos" pitchFamily="34" charset="-122"/>
+                <a:cs typeface="Aptos" pitchFamily="34" charset="-120"/>
+              </a:rPr>
+              <a:t>• </a:t>
+            </a:r>
             <a:r>
               <a:rPr lang="en-US" sz="1770" dirty="0">
                 <a:solidFill>
@@ -10397,12 +9943,9 @@
                 <a:ea typeface="Aptos" pitchFamily="34" charset="-122"/>
                 <a:cs typeface="Aptos" pitchFamily="34" charset="-120"/>
               </a:rPr>
-              <a:t>
+              <a:t>Original samples remain at indices n = kL.
 </a:t>
             </a:r>
-            <a:pPr indent="0" marL="0">
-              <a:buNone/>
-            </a:pPr>
             <a:r>
               <a:rPr lang="en-US" sz="1770" b="1" dirty="0">
                 <a:solidFill>
@@ -10414,9 +9957,6 @@
               </a:rPr>
               <a:t>• </a:t>
             </a:r>
-            <a:pPr indent="0" marL="0">
-              <a:buNone/>
-            </a:pPr>
             <a:r>
               <a:rPr lang="en-US" sz="1770" dirty="0">
                 <a:solidFill>
@@ -10426,26 +9966,9 @@
                 <a:ea typeface="Aptos" pitchFamily="34" charset="-122"/>
                 <a:cs typeface="Aptos" pitchFamily="34" charset="-120"/>
               </a:rPr>
-              <a:t>Original samples remain at indices n = kL.</a:t>
-            </a:r>
-            <a:pPr indent="0" marL="0">
-              <a:buNone/>
-            </a:pPr>
-            <a:r>
-              <a:rPr lang="en-US" sz="1770" dirty="0">
-                <a:solidFill>
-                  <a:srgbClr val="1E293B"/>
-                </a:solidFill>
-                <a:latin typeface="Aptos" pitchFamily="34" charset="0"/>
-                <a:ea typeface="Aptos" pitchFamily="34" charset="-122"/>
-                <a:cs typeface="Aptos" pitchFamily="34" charset="-120"/>
-              </a:rPr>
-              <a:t>
+              <a:t>Inserted zeros are placeholders—not estimates of the missing waveform.
 </a:t>
             </a:r>
-            <a:pPr indent="0" marL="0">
-              <a:buNone/>
-            </a:pPr>
             <a:r>
               <a:rPr lang="en-US" sz="1770" b="1" dirty="0">
                 <a:solidFill>
@@ -10457,52 +9980,6 @@
               </a:rPr>
               <a:t>• </a:t>
             </a:r>
-            <a:pPr indent="0" marL="0">
-              <a:buNone/>
-            </a:pPr>
-            <a:r>
-              <a:rPr lang="en-US" sz="1770" dirty="0">
-                <a:solidFill>
-                  <a:srgbClr val="1E293B"/>
-                </a:solidFill>
-                <a:latin typeface="Aptos" pitchFamily="34" charset="0"/>
-                <a:ea typeface="Aptos" pitchFamily="34" charset="-122"/>
-                <a:cs typeface="Aptos" pitchFamily="34" charset="-120"/>
-              </a:rPr>
-              <a:t>Inserted zeros are placeholders—not estimates of the missing waveform.</a:t>
-            </a:r>
-            <a:pPr indent="0" marL="0">
-              <a:buNone/>
-            </a:pPr>
-            <a:r>
-              <a:rPr lang="en-US" sz="1770" dirty="0">
-                <a:solidFill>
-                  <a:srgbClr val="1E293B"/>
-                </a:solidFill>
-                <a:latin typeface="Aptos" pitchFamily="34" charset="0"/>
-                <a:ea typeface="Aptos" pitchFamily="34" charset="-122"/>
-                <a:cs typeface="Aptos" pitchFamily="34" charset="-120"/>
-              </a:rPr>
-              <a:t>
-</a:t>
-            </a:r>
-            <a:pPr indent="0" marL="0">
-              <a:buNone/>
-            </a:pPr>
-            <a:r>
-              <a:rPr lang="en-US" sz="1770" b="1" dirty="0">
-                <a:solidFill>
-                  <a:srgbClr val="2F80A6"/>
-                </a:solidFill>
-                <a:latin typeface="Aptos" pitchFamily="34" charset="0"/>
-                <a:ea typeface="Aptos" pitchFamily="34" charset="-122"/>
-                <a:cs typeface="Aptos" pitchFamily="34" charset="-120"/>
-              </a:rPr>
-              <a:t>• </a:t>
-            </a:r>
-            <a:pPr indent="0" marL="0">
-              <a:buNone/>
-            </a:pPr>
             <a:r>
               <a:rPr lang="en-US" sz="1770" dirty="0">
                 <a:solidFill>
@@ -10520,14 +9997,14 @@
       </p:sp>
       <p:pic>
         <p:nvPicPr>
-          <p:cNvPr id="6" name="Image 1" descr="/mnt/data/week6_multirate/assets/upsample_time.png">    </p:cNvPr>
+          <p:cNvPr id="6" name="Image 1" descr="/mnt/data/week6_multirate/assets/upsample_time.png"/>
           <p:cNvPicPr>
             <a:picLocks noChangeAspect="1"/>
           </p:cNvPicPr>
           <p:nvPr/>
         </p:nvPicPr>
         <p:blipFill>
-          <a:blip r:embed="rId3"/>
+          <a:blip r:embed="rId4"/>
           <a:stretch>
             <a:fillRect/>
           </a:stretch>
@@ -10562,7 +10039,7 @@
           </a:prstGeom>
           <a:extLst>
             <a:ext uri="{C572A759-6A51-4108-AA02-DFA0A04FC94B}">
-              <ma14:wrappingTextBoxFlag xmlns:ma14="http://schemas.microsoft.com/office/mac/drawingml/2011/main" val="0"/>
+              <ma14:wrappingTextBoxFlag xmlns:ma14="http://schemas.microsoft.com/office/mac/drawingml/2011/main" xmlns="" val="0"/>
             </a:ext>
           </a:extLst>
         </p:spPr>
@@ -10583,7 +10060,7 @@
           <a:p>
             <a:pPr algn="r"/>
             <a:fld id="{F7021451-1387-4CA6-816F-3879F97B5CBC}" type="slidenum">
-              <a:rPr b="0" lang="en-US"/>
+              <a:rPr lang="en-US" b="0"/>
               <a:t>4</a:t>
             </a:fld>
             <a:endParaRPr lang="en-US"/>
@@ -10636,7 +10113,7 @@
           <a:bodyPr wrap="square" lIns="0" tIns="0" rIns="0" bIns="0" rtlCol="0" anchor="ctr"/>
           <a:lstStyle/>
           <a:p>
-            <a:pPr indent="0" marL="0">
+            <a:pPr marL="0" indent="0">
               <a:buNone/>
             </a:pPr>
             <a:r>
@@ -10677,7 +10154,7 @@
           </a:bodyPr>
           <a:lstStyle/>
           <a:p>
-            <a:pPr indent="0" marL="0">
+            <a:pPr marL="0" indent="0">
               <a:buNone/>
             </a:pPr>
             <a:r>
@@ -10697,17 +10174,17 @@
       </p:sp>
       <p:pic>
         <p:nvPicPr>
-          <p:cNvPr id="4" name="Image 0" descr="preencoded.png">    </p:cNvPr>
+          <p:cNvPr id="4" name="Image 0" descr="preencoded.png"/>
           <p:cNvPicPr>
             <a:picLocks noChangeAspect="1"/>
           </p:cNvPicPr>
           <p:nvPr/>
         </p:nvPicPr>
         <p:blipFill>
-          <a:blip r:embed="rId1">
+          <a:blip>
             <a:extLst>
               <a:ext uri="{96DAC541-7B7A-43D3-8B79-37D633B846F1}">
-                <asvg:svgBlip xmlns:asvg="http://schemas.microsoft.com/office/drawing/2016/SVG/main" r:embed="rId2"/>
+                <asvg:svgBlip xmlns:asvg="http://schemas.microsoft.com/office/drawing/2016/SVG/main" r:embed="rId3"/>
               </a:ext>
             </a:extLst>
           </a:blip>
@@ -10748,7 +10225,7 @@
           </a:bodyPr>
           <a:lstStyle/>
           <a:p>
-            <a:pPr indent="0" marL="0">
+            <a:pPr marL="0" indent="0">
               <a:buNone/>
             </a:pPr>
             <a:r>
@@ -10762,9 +10239,6 @@
               </a:rPr>
               <a:t>• </a:t>
             </a:r>
-            <a:pPr indent="0" marL="0">
-              <a:buNone/>
-            </a:pPr>
             <a:r>
               <a:rPr lang="en-US" sz="1750" b="1" dirty="0">
                 <a:solidFill>
@@ -10776,9 +10250,6 @@
               </a:rPr>
               <a:t>Compression:</a:t>
             </a:r>
-            <a:pPr indent="0" marL="0">
-              <a:buNone/>
-            </a:pPr>
             <a:r>
               <a:rPr lang="en-US" sz="1750" dirty="0">
                 <a:solidFill>
@@ -10788,11 +10259,31 @@
                 <a:ea typeface="Aptos" pitchFamily="34" charset="-122"/>
                 <a:cs typeface="Aptos" pitchFamily="34" charset="-120"/>
               </a:rPr>
-              <a:t> the original spectrum is squeezed by L.</a:t>
-            </a:r>
-            <a:pPr indent="0" marL="0">
-              <a:buNone/>
-            </a:pPr>
+              <a:t> the original spectrum is squeezed by L.
+</a:t>
+            </a:r>
+            <a:r>
+              <a:rPr lang="en-US" sz="1750" b="1" dirty="0">
+                <a:solidFill>
+                  <a:srgbClr val="2F80A6"/>
+                </a:solidFill>
+                <a:latin typeface="Aptos" pitchFamily="34" charset="0"/>
+                <a:ea typeface="Aptos" pitchFamily="34" charset="-122"/>
+                <a:cs typeface="Aptos" pitchFamily="34" charset="-120"/>
+              </a:rPr>
+              <a:t>• </a:t>
+            </a:r>
+            <a:r>
+              <a:rPr lang="en-US" sz="1750" b="1" dirty="0">
+                <a:solidFill>
+                  <a:srgbClr val="1E293B"/>
+                </a:solidFill>
+                <a:latin typeface="Aptos" pitchFamily="34" charset="0"/>
+                <a:ea typeface="Aptos" pitchFamily="34" charset="-122"/>
+                <a:cs typeface="Aptos" pitchFamily="34" charset="-120"/>
+              </a:rPr>
+              <a:t>Periodicity:</a:t>
+            </a:r>
             <a:r>
               <a:rPr lang="en-US" sz="1750" dirty="0">
                 <a:solidFill>
@@ -10802,12 +10293,9 @@
                 <a:ea typeface="Aptos" pitchFamily="34" charset="-122"/>
                 <a:cs typeface="Aptos" pitchFamily="34" charset="-120"/>
               </a:rPr>
-              <a:t>
+              <a:t> the compressed copy repeats L times over [−π, π].
 </a:t>
             </a:r>
-            <a:pPr indent="0" marL="0">
-              <a:buNone/>
-            </a:pPr>
             <a:r>
               <a:rPr lang="en-US" sz="1750" b="1" dirty="0">
                 <a:solidFill>
@@ -10819,9 +10307,6 @@
               </a:rPr>
               <a:t>• </a:t>
             </a:r>
-            <a:pPr indent="0" marL="0">
-              <a:buNone/>
-            </a:pPr>
             <a:r>
               <a:rPr lang="en-US" sz="1750" b="1" dirty="0">
                 <a:solidFill>
@@ -10831,11 +10316,8 @@
                 <a:ea typeface="Aptos" pitchFamily="34" charset="-122"/>
                 <a:cs typeface="Aptos" pitchFamily="34" charset="-120"/>
               </a:rPr>
-              <a:t>Periodicity:</a:t>
-            </a:r>
-            <a:pPr indent="0" marL="0">
-              <a:buNone/>
-            </a:pPr>
+              <a:t>Images:</a:t>
+            </a:r>
             <a:r>
               <a:rPr lang="en-US" sz="1750" dirty="0">
                 <a:solidFill>
@@ -10845,13 +10327,22 @@
                 <a:ea typeface="Aptos" pitchFamily="34" charset="-122"/>
                 <a:cs typeface="Aptos" pitchFamily="34" charset="-120"/>
               </a:rPr>
-              <a:t> the compressed copy repeats L times over [−π, π].</a:t>
-            </a:r>
-            <a:pPr indent="0" marL="0">
-              <a:buNone/>
-            </a:pPr>
-            <a:r>
-              <a:rPr lang="en-US" sz="1750" dirty="0">
+              <a:t> the extra replicas are artifacts of zero insertion.
+</a:t>
+            </a:r>
+            <a:r>
+              <a:rPr lang="en-US" sz="1750" b="1" dirty="0">
+                <a:solidFill>
+                  <a:srgbClr val="2F80A6"/>
+                </a:solidFill>
+                <a:latin typeface="Aptos" pitchFamily="34" charset="0"/>
+                <a:ea typeface="Aptos" pitchFamily="34" charset="-122"/>
+                <a:cs typeface="Aptos" pitchFamily="34" charset="-120"/>
+              </a:rPr>
+              <a:t>• </a:t>
+            </a:r>
+            <a:r>
+              <a:rPr lang="en-US" sz="1750" b="1" dirty="0">
                 <a:solidFill>
                   <a:srgbClr val="1E293B"/>
                 </a:solidFill>
@@ -10859,97 +10350,8 @@
                 <a:ea typeface="Aptos" pitchFamily="34" charset="-122"/>
                 <a:cs typeface="Aptos" pitchFamily="34" charset="-120"/>
               </a:rPr>
-              <a:t>
-</a:t>
-            </a:r>
-            <a:pPr indent="0" marL="0">
-              <a:buNone/>
-            </a:pPr>
-            <a:r>
-              <a:rPr lang="en-US" sz="1750" b="1" dirty="0">
-                <a:solidFill>
-                  <a:srgbClr val="2F80A6"/>
-                </a:solidFill>
-                <a:latin typeface="Aptos" pitchFamily="34" charset="0"/>
-                <a:ea typeface="Aptos" pitchFamily="34" charset="-122"/>
-                <a:cs typeface="Aptos" pitchFamily="34" charset="-120"/>
-              </a:rPr>
-              <a:t>• </a:t>
-            </a:r>
-            <a:pPr indent="0" marL="0">
-              <a:buNone/>
-            </a:pPr>
-            <a:r>
-              <a:rPr lang="en-US" sz="1750" b="1" dirty="0">
-                <a:solidFill>
-                  <a:srgbClr val="1E293B"/>
-                </a:solidFill>
-                <a:latin typeface="Aptos" pitchFamily="34" charset="0"/>
-                <a:ea typeface="Aptos" pitchFamily="34" charset="-122"/>
-                <a:cs typeface="Aptos" pitchFamily="34" charset="-120"/>
-              </a:rPr>
-              <a:t>Images:</a:t>
-            </a:r>
-            <a:pPr indent="0" marL="0">
-              <a:buNone/>
-            </a:pPr>
-            <a:r>
-              <a:rPr lang="en-US" sz="1750" dirty="0">
-                <a:solidFill>
-                  <a:srgbClr val="1E293B"/>
-                </a:solidFill>
-                <a:latin typeface="Aptos" pitchFamily="34" charset="0"/>
-                <a:ea typeface="Aptos" pitchFamily="34" charset="-122"/>
-                <a:cs typeface="Aptos" pitchFamily="34" charset="-120"/>
-              </a:rPr>
-              <a:t> the extra replicas are artifacts of zero insertion.</a:t>
-            </a:r>
-            <a:pPr indent="0" marL="0">
-              <a:buNone/>
-            </a:pPr>
-            <a:r>
-              <a:rPr lang="en-US" sz="1750" dirty="0">
-                <a:solidFill>
-                  <a:srgbClr val="1E293B"/>
-                </a:solidFill>
-                <a:latin typeface="Aptos" pitchFamily="34" charset="0"/>
-                <a:ea typeface="Aptos" pitchFamily="34" charset="-122"/>
-                <a:cs typeface="Aptos" pitchFamily="34" charset="-120"/>
-              </a:rPr>
-              <a:t>
-</a:t>
-            </a:r>
-            <a:pPr indent="0" marL="0">
-              <a:buNone/>
-            </a:pPr>
-            <a:r>
-              <a:rPr lang="en-US" sz="1750" b="1" dirty="0">
-                <a:solidFill>
-                  <a:srgbClr val="2F80A6"/>
-                </a:solidFill>
-                <a:latin typeface="Aptos" pitchFamily="34" charset="0"/>
-                <a:ea typeface="Aptos" pitchFamily="34" charset="-122"/>
-                <a:cs typeface="Aptos" pitchFamily="34" charset="-120"/>
-              </a:rPr>
-              <a:t>• </a:t>
-            </a:r>
-            <a:pPr indent="0" marL="0">
-              <a:buNone/>
-            </a:pPr>
-            <a:r>
-              <a:rPr lang="en-US" sz="1750" b="1" dirty="0">
-                <a:solidFill>
-                  <a:srgbClr val="1E293B"/>
-                </a:solidFill>
-                <a:latin typeface="Aptos" pitchFamily="34" charset="0"/>
-                <a:ea typeface="Aptos" pitchFamily="34" charset="-122"/>
-                <a:cs typeface="Aptos" pitchFamily="34" charset="-120"/>
-              </a:rPr>
               <a:t>Goal:</a:t>
             </a:r>
-            <a:pPr indent="0" marL="0">
-              <a:buNone/>
-            </a:pPr>
             <a:r>
               <a:rPr lang="en-US" sz="1750" dirty="0">
                 <a:solidFill>
@@ -10967,14 +10369,14 @@
       </p:sp>
       <p:pic>
         <p:nvPicPr>
-          <p:cNvPr id="6" name="Image 1" descr="/mnt/data/week6_multirate/assets/spectrum_images.png">    </p:cNvPr>
+          <p:cNvPr id="6" name="Image 1" descr="/mnt/data/week6_multirate/assets/spectrum_images.png"/>
           <p:cNvPicPr>
             <a:picLocks noChangeAspect="1"/>
           </p:cNvPicPr>
           <p:nvPr/>
         </p:nvPicPr>
         <p:blipFill>
-          <a:blip r:embed="rId3"/>
+          <a:blip r:embed="rId4"/>
           <a:stretch>
             <a:fillRect/>
           </a:stretch>
@@ -11009,7 +10411,7 @@
           </a:prstGeom>
           <a:extLst>
             <a:ext uri="{C572A759-6A51-4108-AA02-DFA0A04FC94B}">
-              <ma14:wrappingTextBoxFlag xmlns:ma14="http://schemas.microsoft.com/office/mac/drawingml/2011/main" val="0"/>
+              <ma14:wrappingTextBoxFlag xmlns:ma14="http://schemas.microsoft.com/office/mac/drawingml/2011/main" xmlns="" val="0"/>
             </a:ext>
           </a:extLst>
         </p:spPr>
@@ -11030,7 +10432,7 @@
           <a:p>
             <a:pPr algn="r"/>
             <a:fld id="{F7021451-1387-4CA6-816F-3879F97B5CBC}" type="slidenum">
-              <a:rPr b="0" lang="en-US"/>
+              <a:rPr lang="en-US" b="0"/>
               <a:t>5</a:t>
             </a:fld>
             <a:endParaRPr lang="en-US"/>
@@ -11083,7 +10485,7 @@
           <a:bodyPr wrap="square" lIns="0" tIns="0" rIns="0" bIns="0" rtlCol="0" anchor="ctr"/>
           <a:lstStyle/>
           <a:p>
-            <a:pPr indent="0" marL="0">
+            <a:pPr marL="0" indent="0">
               <a:buNone/>
             </a:pPr>
             <a:r>
@@ -11124,7 +10526,7 @@
           </a:bodyPr>
           <a:lstStyle/>
           <a:p>
-            <a:pPr indent="0" marL="0">
+            <a:pPr marL="0" indent="0">
               <a:buNone/>
             </a:pPr>
             <a:r>
@@ -11166,6 +10568,13 @@
             <a:prstDash val="solid"/>
           </a:ln>
         </p:spPr>
+        <p:txBody>
+          <a:bodyPr/>
+          <a:lstStyle/>
+          <a:p>
+            <a:endParaRPr lang="en-US"/>
+          </a:p>
+        </p:txBody>
       </p:sp>
       <p:sp>
         <p:nvSpPr>
@@ -11190,7 +10599,7 @@
           </a:bodyPr>
           <a:lstStyle/>
           <a:p>
-            <a:pPr algn="ctr" indent="0" marL="0">
+            <a:pPr marL="0" indent="0" algn="ctr">
               <a:buNone/>
             </a:pPr>
             <a:r>
@@ -11232,6 +10641,13 @@
             <a:prstDash val="solid"/>
           </a:ln>
         </p:spPr>
+        <p:txBody>
+          <a:bodyPr/>
+          <a:lstStyle/>
+          <a:p>
+            <a:endParaRPr lang="en-US"/>
+          </a:p>
+        </p:txBody>
       </p:sp>
       <p:sp>
         <p:nvSpPr>
@@ -11254,7 +10670,7 @@
           <a:bodyPr wrap="square" lIns="0" tIns="0" rIns="0" bIns="0" rtlCol="0" anchor="ctr"/>
           <a:lstStyle/>
           <a:p>
-            <a:pPr algn="ctr" indent="0" marL="0">
+            <a:pPr marL="0" indent="0" algn="ctr">
               <a:buNone/>
             </a:pPr>
             <a:r>
@@ -11292,7 +10708,7 @@
           </a:prstGeom>
           <a:extLst>
             <a:ext uri="{C572A759-6A51-4108-AA02-DFA0A04FC94B}">
-              <ma14:wrappingTextBoxFlag xmlns:ma14="http://schemas.microsoft.com/office/mac/drawingml/2011/main" val="0"/>
+              <ma14:wrappingTextBoxFlag xmlns:ma14="http://schemas.microsoft.com/office/mac/drawingml/2011/main" xmlns="" val="0"/>
             </a:ext>
           </a:extLst>
         </p:spPr>
@@ -11313,7 +10729,7 @@
           <a:p>
             <a:pPr algn="r"/>
             <a:fld id="{F7021451-1387-4CA6-816F-3879F97B5CBC}" type="slidenum">
-              <a:rPr b="0" lang="en-US"/>
+              <a:rPr lang="en-US" b="0"/>
               <a:t>6</a:t>
             </a:fld>
             <a:endParaRPr lang="en-US"/>
@@ -11336,6 +10752,7 @@
         <a:solidFill>
           <a:srgbClr val="16324F"/>
         </a:solidFill>
+        <a:effectLst/>
       </p:bgPr>
     </p:bg>
     <p:spTree>
@@ -11373,7 +10790,7 @@
           <a:bodyPr wrap="square" lIns="0" tIns="0" rIns="0" bIns="0" rtlCol="0" anchor="ctr"/>
           <a:lstStyle/>
           <a:p>
-            <a:pPr indent="0" marL="0">
+            <a:pPr marL="0" indent="0">
               <a:buNone/>
             </a:pPr>
             <a:r>
@@ -11414,7 +10831,7 @@
           </a:bodyPr>
           <a:lstStyle/>
           <a:p>
-            <a:pPr indent="0" marL="0">
+            <a:pPr marL="0" indent="0">
               <a:buNone/>
             </a:pPr>
             <a:r>
@@ -11455,7 +10872,7 @@
           </a:bodyPr>
           <a:lstStyle/>
           <a:p>
-            <a:pPr indent="0" marL="0">
+            <a:pPr marL="0" indent="0">
               <a:buNone/>
             </a:pPr>
             <a:r>
@@ -11519,7 +10936,7 @@
           <a:bodyPr wrap="square" lIns="0" tIns="0" rIns="0" bIns="0" rtlCol="0" anchor="ctr"/>
           <a:lstStyle/>
           <a:p>
-            <a:pPr indent="0" marL="0">
+            <a:pPr marL="0" indent="0">
               <a:buNone/>
             </a:pPr>
             <a:r>
@@ -11560,7 +10977,7 @@
           </a:bodyPr>
           <a:lstStyle/>
           <a:p>
-            <a:pPr indent="0" marL="0">
+            <a:pPr marL="0" indent="0">
               <a:buNone/>
             </a:pPr>
             <a:r>
@@ -11602,6 +11019,13 @@
             <a:prstDash val="solid"/>
           </a:ln>
         </p:spPr>
+        <p:txBody>
+          <a:bodyPr/>
+          <a:lstStyle/>
+          <a:p>
+            <a:endParaRPr lang="en-US"/>
+          </a:p>
+        </p:txBody>
       </p:sp>
       <p:sp>
         <p:nvSpPr>
@@ -11626,7 +11050,7 @@
           </a:bodyPr>
           <a:lstStyle/>
           <a:p>
-            <a:pPr algn="ctr" indent="0" marL="0">
+            <a:pPr marL="0" indent="0" algn="ctr">
               <a:buNone/>
             </a:pPr>
             <a:r>
@@ -11668,6 +11092,13 @@
             <a:tailEnd type="triangle"/>
           </a:ln>
         </p:spPr>
+        <p:txBody>
+          <a:bodyPr/>
+          <a:lstStyle/>
+          <a:p>
+            <a:endParaRPr lang="en-US"/>
+          </a:p>
+        </p:txBody>
       </p:sp>
       <p:sp>
         <p:nvSpPr>
@@ -11693,6 +11124,13 @@
             <a:prstDash val="solid"/>
           </a:ln>
         </p:spPr>
+        <p:txBody>
+          <a:bodyPr/>
+          <a:lstStyle/>
+          <a:p>
+            <a:endParaRPr lang="en-US"/>
+          </a:p>
+        </p:txBody>
       </p:sp>
       <p:sp>
         <p:nvSpPr>
@@ -11717,7 +11155,7 @@
           </a:bodyPr>
           <a:lstStyle/>
           <a:p>
-            <a:pPr algn="ctr" indent="0" marL="0">
+            <a:pPr marL="0" indent="0" algn="ctr">
               <a:buNone/>
             </a:pPr>
             <a:r>
@@ -11759,6 +11197,13 @@
             <a:tailEnd type="triangle"/>
           </a:ln>
         </p:spPr>
+        <p:txBody>
+          <a:bodyPr/>
+          <a:lstStyle/>
+          <a:p>
+            <a:endParaRPr lang="en-US"/>
+          </a:p>
+        </p:txBody>
       </p:sp>
       <p:sp>
         <p:nvSpPr>
@@ -11784,6 +11229,13 @@
             <a:prstDash val="solid"/>
           </a:ln>
         </p:spPr>
+        <p:txBody>
+          <a:bodyPr/>
+          <a:lstStyle/>
+          <a:p>
+            <a:endParaRPr lang="en-US"/>
+          </a:p>
+        </p:txBody>
       </p:sp>
       <p:sp>
         <p:nvSpPr>
@@ -11808,7 +11260,7 @@
           </a:bodyPr>
           <a:lstStyle/>
           <a:p>
-            <a:pPr algn="ctr" indent="0" marL="0">
+            <a:pPr marL="0" indent="0" algn="ctr">
               <a:buNone/>
             </a:pPr>
             <a:r>
@@ -11825,7 +11277,7 @@
             <a:endParaRPr lang="en-US" sz="1600" dirty="0"/>
           </a:p>
           <a:p>
-            <a:pPr algn="ctr" indent="0" marL="0">
+            <a:pPr marL="0" indent="0" algn="ctr">
               <a:buNone/>
             </a:pPr>
             <a:r>
@@ -11867,6 +11319,13 @@
             <a:tailEnd type="triangle"/>
           </a:ln>
         </p:spPr>
+        <p:txBody>
+          <a:bodyPr/>
+          <a:lstStyle/>
+          <a:p>
+            <a:endParaRPr lang="en-US"/>
+          </a:p>
+        </p:txBody>
       </p:sp>
       <p:sp>
         <p:nvSpPr>
@@ -11892,6 +11351,13 @@
             <a:prstDash val="solid"/>
           </a:ln>
         </p:spPr>
+        <p:txBody>
+          <a:bodyPr/>
+          <a:lstStyle/>
+          <a:p>
+            <a:endParaRPr lang="en-US"/>
+          </a:p>
+        </p:txBody>
       </p:sp>
       <p:sp>
         <p:nvSpPr>
@@ -11916,7 +11382,7 @@
           </a:bodyPr>
           <a:lstStyle/>
           <a:p>
-            <a:pPr algn="ctr" indent="0" marL="0">
+            <a:pPr marL="0" indent="0" algn="ctr">
               <a:buNone/>
             </a:pPr>
             <a:r>
@@ -11960,13 +11426,20 @@
             <a:prstDash val="solid"/>
           </a:ln>
           <a:effectLst>
-            <a:outerShdw sx="100000" sy="100000" kx="0" ky="0" algn="bl" rotWithShape="0" blurRad="16510" dist="8890" dir="2700000">
+            <a:outerShdw blurRad="16510" dist="8890" dir="2700000" algn="bl" rotWithShape="0">
               <a:srgbClr val="000000">
                 <a:alpha val="12000"/>
               </a:srgbClr>
             </a:outerShdw>
           </a:effectLst>
         </p:spPr>
+        <p:txBody>
+          <a:bodyPr/>
+          <a:lstStyle/>
+          <a:p>
+            <a:endParaRPr lang="en-US"/>
+          </a:p>
+        </p:txBody>
       </p:sp>
       <p:sp>
         <p:nvSpPr>
@@ -11989,7 +11462,7 @@
           <a:bodyPr wrap="square" lIns="0" tIns="0" rIns="0" bIns="0" rtlCol="0" anchor="ctr"/>
           <a:lstStyle/>
           <a:p>
-            <a:pPr indent="0" marL="0">
+            <a:pPr marL="0" indent="0">
               <a:buNone/>
             </a:pPr>
             <a:r>
@@ -12030,7 +11503,7 @@
           </a:bodyPr>
           <a:lstStyle/>
           <a:p>
-            <a:pPr indent="0" marL="0">
+            <a:pPr marL="0" indent="0">
               <a:buNone/>
             </a:pPr>
             <a:r>
@@ -12074,13 +11547,20 @@
             <a:prstDash val="solid"/>
           </a:ln>
           <a:effectLst>
-            <a:outerShdw sx="100000" sy="100000" kx="0" ky="0" algn="bl" rotWithShape="0" blurRad="16510" dist="8890" dir="2700000">
+            <a:outerShdw blurRad="16510" dist="8890" dir="2700000" algn="bl" rotWithShape="0">
               <a:srgbClr val="000000">
                 <a:alpha val="12000"/>
               </a:srgbClr>
             </a:outerShdw>
           </a:effectLst>
         </p:spPr>
+        <p:txBody>
+          <a:bodyPr/>
+          <a:lstStyle/>
+          <a:p>
+            <a:endParaRPr lang="en-US"/>
+          </a:p>
+        </p:txBody>
       </p:sp>
       <p:sp>
         <p:nvSpPr>
@@ -12103,7 +11583,7 @@
           <a:bodyPr wrap="square" lIns="0" tIns="0" rIns="0" bIns="0" rtlCol="0" anchor="ctr"/>
           <a:lstStyle/>
           <a:p>
-            <a:pPr indent="0" marL="0">
+            <a:pPr marL="0" indent="0">
               <a:buNone/>
             </a:pPr>
             <a:r>
@@ -12144,7 +11624,7 @@
           </a:bodyPr>
           <a:lstStyle/>
           <a:p>
-            <a:pPr indent="0" marL="0">
+            <a:pPr marL="0" indent="0">
               <a:buNone/>
             </a:pPr>
             <a:r>
@@ -12188,13 +11668,20 @@
             <a:prstDash val="solid"/>
           </a:ln>
           <a:effectLst>
-            <a:outerShdw sx="100000" sy="100000" kx="0" ky="0" algn="bl" rotWithShape="0" blurRad="16510" dist="8890" dir="2700000">
+            <a:outerShdw blurRad="16510" dist="8890" dir="2700000" algn="bl" rotWithShape="0">
               <a:srgbClr val="000000">
                 <a:alpha val="12000"/>
               </a:srgbClr>
             </a:outerShdw>
           </a:effectLst>
         </p:spPr>
+        <p:txBody>
+          <a:bodyPr/>
+          <a:lstStyle/>
+          <a:p>
+            <a:endParaRPr lang="en-US"/>
+          </a:p>
+        </p:txBody>
       </p:sp>
       <p:sp>
         <p:nvSpPr>
@@ -12217,7 +11704,7 @@
           <a:bodyPr wrap="square" lIns="0" tIns="0" rIns="0" bIns="0" rtlCol="0" anchor="ctr"/>
           <a:lstStyle/>
           <a:p>
-            <a:pPr indent="0" marL="0">
+            <a:pPr marL="0" indent="0">
               <a:buNone/>
             </a:pPr>
             <a:r>
@@ -12254,11 +11741,11 @@
         </p:spPr>
         <p:txBody>
           <a:bodyPr wrap="square" lIns="0" tIns="0" rIns="0" bIns="0" rtlCol="0" anchor="ctr">
-            <a:normAutofit/>
+            <a:normAutofit fontScale="92500"/>
           </a:bodyPr>
           <a:lstStyle/>
           <a:p>
-            <a:pPr indent="0" marL="0">
+            <a:pPr marL="0" indent="0">
               <a:buNone/>
             </a:pPr>
             <a:r>
@@ -12296,7 +11783,7 @@
           </a:prstGeom>
           <a:extLst>
             <a:ext uri="{C572A759-6A51-4108-AA02-DFA0A04FC94B}">
-              <ma14:wrappingTextBoxFlag xmlns:ma14="http://schemas.microsoft.com/office/mac/drawingml/2011/main" val="0"/>
+              <ma14:wrappingTextBoxFlag xmlns:ma14="http://schemas.microsoft.com/office/mac/drawingml/2011/main" xmlns="" val="0"/>
             </a:ext>
           </a:extLst>
         </p:spPr>
@@ -12317,7 +11804,7 @@
           <a:p>
             <a:pPr algn="r"/>
             <a:fld id="{F7021451-1387-4CA6-816F-3879F97B5CBC}" type="slidenum">
-              <a:rPr b="0" lang="en-US"/>
+              <a:rPr lang="en-US" b="0"/>
               <a:t>8</a:t>
             </a:fld>
             <a:endParaRPr lang="en-US"/>
@@ -12370,7 +11857,7 @@
           <a:bodyPr wrap="square" lIns="0" tIns="0" rIns="0" bIns="0" rtlCol="0" anchor="ctr"/>
           <a:lstStyle/>
           <a:p>
-            <a:pPr indent="0" marL="0">
+            <a:pPr marL="0" indent="0">
               <a:buNone/>
             </a:pPr>
             <a:r>
@@ -12411,7 +11898,7 @@
           </a:bodyPr>
           <a:lstStyle/>
           <a:p>
-            <a:pPr indent="0" marL="0">
+            <a:pPr marL="0" indent="0">
               <a:buNone/>
             </a:pPr>
             <a:r>
@@ -12450,7 +11937,7 @@
           <a:bodyPr wrap="square" lIns="0" tIns="0" rIns="0" bIns="0" rtlCol="0" anchor="ctr"/>
           <a:lstStyle/>
           <a:p>
-            <a:pPr indent="0" marL="0">
+            <a:pPr marL="0" indent="0">
               <a:buNone/>
             </a:pPr>
             <a:r>
@@ -12494,13 +11981,20 @@
             <a:prstDash val="solid"/>
           </a:ln>
           <a:effectLst>
-            <a:outerShdw sx="100000" sy="100000" kx="0" ky="0" algn="bl" rotWithShape="0" blurRad="16510" dist="8890" dir="2700000">
+            <a:outerShdw blurRad="16510" dist="8890" dir="2700000" algn="bl" rotWithShape="0">
               <a:srgbClr val="000000">
                 <a:alpha val="12000"/>
               </a:srgbClr>
             </a:outerShdw>
           </a:effectLst>
         </p:spPr>
+        <p:txBody>
+          <a:bodyPr/>
+          <a:lstStyle/>
+          <a:p>
+            <a:endParaRPr lang="en-US"/>
+          </a:p>
+        </p:txBody>
       </p:sp>
       <p:sp>
         <p:nvSpPr>
@@ -12523,7 +12017,7 @@
           <a:bodyPr wrap="square" lIns="0" tIns="0" rIns="0" bIns="0" rtlCol="0" anchor="ctr"/>
           <a:lstStyle/>
           <a:p>
-            <a:pPr indent="0" marL="0">
+            <a:pPr marL="0" indent="0">
               <a:buNone/>
             </a:pPr>
             <a:r>
@@ -12564,7 +12058,7 @@
           </a:bodyPr>
           <a:lstStyle/>
           <a:p>
-            <a:pPr indent="0" marL="0">
+            <a:pPr marL="0" indent="0">
               <a:buNone/>
             </a:pPr>
             <a:r>
@@ -12581,7 +12075,7 @@
             <a:endParaRPr lang="en-US" sz="1350" dirty="0"/>
           </a:p>
           <a:p>
-            <a:pPr indent="0" marL="0">
+            <a:pPr marL="0" indent="0">
               <a:buNone/>
             </a:pPr>
             <a:r>
@@ -12623,6 +12117,13 @@
             <a:tailEnd type="triangle"/>
           </a:ln>
         </p:spPr>
+        <p:txBody>
+          <a:bodyPr/>
+          <a:lstStyle/>
+          <a:p>
+            <a:endParaRPr lang="en-US"/>
+          </a:p>
+        </p:txBody>
       </p:sp>
       <p:sp>
         <p:nvSpPr>
@@ -12650,13 +12151,20 @@
             <a:prstDash val="solid"/>
           </a:ln>
           <a:effectLst>
-            <a:outerShdw sx="100000" sy="100000" kx="0" ky="0" algn="bl" rotWithShape="0" blurRad="16510" dist="8890" dir="2700000">
+            <a:outerShdw blurRad="16510" dist="8890" dir="2700000" algn="bl" rotWithShape="0">
               <a:srgbClr val="000000">
                 <a:alpha val="12000"/>
               </a:srgbClr>
             </a:outerShdw>
           </a:effectLst>
         </p:spPr>
+        <p:txBody>
+          <a:bodyPr/>
+          <a:lstStyle/>
+          <a:p>
+            <a:endParaRPr lang="en-US"/>
+          </a:p>
+        </p:txBody>
       </p:sp>
       <p:sp>
         <p:nvSpPr>
@@ -12679,7 +12187,7 @@
           <a:bodyPr wrap="square" lIns="0" tIns="0" rIns="0" bIns="0" rtlCol="0" anchor="ctr"/>
           <a:lstStyle/>
           <a:p>
-            <a:pPr indent="0" marL="0">
+            <a:pPr marL="0" indent="0">
               <a:buNone/>
             </a:pPr>
             <a:r>
@@ -12720,7 +12228,7 @@
           </a:bodyPr>
           <a:lstStyle/>
           <a:p>
-            <a:pPr indent="0" marL="0">
+            <a:pPr marL="0" indent="0">
               <a:buNone/>
             </a:pPr>
             <a:r>
@@ -12764,13 +12272,20 @@
             <a:prstDash val="solid"/>
           </a:ln>
           <a:effectLst>
-            <a:outerShdw sx="100000" sy="100000" kx="0" ky="0" algn="bl" rotWithShape="0" blurRad="16510" dist="8890" dir="2700000">
+            <a:outerShdw blurRad="16510" dist="8890" dir="2700000" algn="bl" rotWithShape="0">
               <a:srgbClr val="000000">
                 <a:alpha val="12000"/>
               </a:srgbClr>
             </a:outerShdw>
           </a:effectLst>
         </p:spPr>
+        <p:txBody>
+          <a:bodyPr/>
+          <a:lstStyle/>
+          <a:p>
+            <a:endParaRPr lang="en-US"/>
+          </a:p>
+        </p:txBody>
       </p:sp>
       <p:sp>
         <p:nvSpPr>
@@ -12793,7 +12308,7 @@
           <a:bodyPr wrap="square" lIns="0" tIns="0" rIns="0" bIns="0" rtlCol="0" anchor="ctr"/>
           <a:lstStyle/>
           <a:p>
-            <a:pPr indent="0" marL="0">
+            <a:pPr marL="0" indent="0">
               <a:buNone/>
             </a:pPr>
             <a:r>
@@ -12834,7 +12349,7 @@
           </a:bodyPr>
           <a:lstStyle/>
           <a:p>
-            <a:pPr indent="0" marL="0">
+            <a:pPr marL="0" indent="0">
               <a:buNone/>
             </a:pPr>
             <a:r>
@@ -12872,7 +12387,7 @@
           </a:prstGeom>
           <a:extLst>
             <a:ext uri="{C572A759-6A51-4108-AA02-DFA0A04FC94B}">
-              <ma14:wrappingTextBoxFlag xmlns:ma14="http://schemas.microsoft.com/office/mac/drawingml/2011/main" val="0"/>
+              <ma14:wrappingTextBoxFlag xmlns:ma14="http://schemas.microsoft.com/office/mac/drawingml/2011/main" xmlns="" val="0"/>
             </a:ext>
           </a:extLst>
         </p:spPr>
@@ -12893,7 +12408,7 @@
           <a:p>
             <a:pPr algn="r"/>
             <a:fld id="{F7021451-1387-4CA6-816F-3879F97B5CBC}" type="slidenum">
-              <a:rPr b="0" lang="en-US"/>
+              <a:rPr lang="en-US" b="0"/>
               <a:t>9</a:t>
             </a:fld>
             <a:endParaRPr lang="en-US"/>
@@ -13201,4 +12716,319 @@
     </a:ext>
   </a:extLst>
 </a:theme>
+</file>
+
+<file path=ppt/theme/theme2.xml><?xml version="1.0" encoding="utf-8"?>
+<a:theme xmlns:a="http://schemas.openxmlformats.org/drawingml/2006/main" name="Office Theme">
+  <a:themeElements>
+    <a:clrScheme name="Office">
+      <a:dk1>
+        <a:sysClr val="windowText" lastClr="000000"/>
+      </a:dk1>
+      <a:lt1>
+        <a:sysClr val="window" lastClr="FFFFFF"/>
+      </a:lt1>
+      <a:dk2>
+        <a:srgbClr val="0E2841"/>
+      </a:dk2>
+      <a:lt2>
+        <a:srgbClr val="E8E8E8"/>
+      </a:lt2>
+      <a:accent1>
+        <a:srgbClr val="156082"/>
+      </a:accent1>
+      <a:accent2>
+        <a:srgbClr val="E97132"/>
+      </a:accent2>
+      <a:accent3>
+        <a:srgbClr val="196B24"/>
+      </a:accent3>
+      <a:accent4>
+        <a:srgbClr val="0F9ED5"/>
+      </a:accent4>
+      <a:accent5>
+        <a:srgbClr val="A02B93"/>
+      </a:accent5>
+      <a:accent6>
+        <a:srgbClr val="4EA72E"/>
+      </a:accent6>
+      <a:hlink>
+        <a:srgbClr val="467886"/>
+      </a:hlink>
+      <a:folHlink>
+        <a:srgbClr val="96607D"/>
+      </a:folHlink>
+    </a:clrScheme>
+    <a:fontScheme name="Office">
+      <a:majorFont>
+        <a:latin typeface="Aptos Display" panose="02110004020202020204"/>
+        <a:ea typeface=""/>
+        <a:cs typeface=""/>
+        <a:font script="Jpan" typeface="游ゴシック Light"/>
+        <a:font script="Hang" typeface="맑은 고딕"/>
+        <a:font script="Hans" typeface="等线 Light"/>
+        <a:font script="Hant" typeface="新細明體"/>
+        <a:font script="Arab" typeface="Times New Roman"/>
+        <a:font script="Hebr" typeface="Times New Roman"/>
+        <a:font script="Thai" typeface="Angsana New"/>
+        <a:font script="Ethi" typeface="Nyala"/>
+        <a:font script="Beng" typeface="Vrinda"/>
+        <a:font script="Gujr" typeface="Shruti"/>
+        <a:font script="Khmr" typeface="MoolBoran"/>
+        <a:font script="Knda" typeface="Tunga"/>
+        <a:font script="Guru" typeface="Raavi"/>
+        <a:font script="Cans" typeface="Euphemia"/>
+        <a:font script="Cher" typeface="Plantagenet Cherokee"/>
+        <a:font script="Yiii" typeface="Microsoft Yi Baiti"/>
+        <a:font script="Tibt" typeface="Microsoft Himalaya"/>
+        <a:font script="Thaa" typeface="MV Boli"/>
+        <a:font script="Deva" typeface="Mangal"/>
+        <a:font script="Telu" typeface="Gautami"/>
+        <a:font script="Taml" typeface="Latha"/>
+        <a:font script="Syrc" typeface="Estrangelo Edessa"/>
+        <a:font script="Orya" typeface="Kalinga"/>
+        <a:font script="Mlym" typeface="Kartika"/>
+        <a:font script="Laoo" typeface="DokChampa"/>
+        <a:font script="Sinh" typeface="Iskoola Pota"/>
+        <a:font script="Mong" typeface="Mongolian Baiti"/>
+        <a:font script="Viet" typeface="Times New Roman"/>
+        <a:font script="Uigh" typeface="Microsoft Uighur"/>
+        <a:font script="Geor" typeface="Sylfaen"/>
+        <a:font script="Armn" typeface="Arial"/>
+        <a:font script="Bugi" typeface="Leelawadee UI"/>
+        <a:font script="Bopo" typeface="Microsoft JhengHei"/>
+        <a:font script="Java" typeface="Javanese Text"/>
+        <a:font script="Lisu" typeface="Segoe UI"/>
+        <a:font script="Mymr" typeface="Myanmar Text"/>
+        <a:font script="Nkoo" typeface="Ebrima"/>
+        <a:font script="Olck" typeface="Nirmala UI"/>
+        <a:font script="Osma" typeface="Ebrima"/>
+        <a:font script="Phag" typeface="Phagspa"/>
+        <a:font script="Syrn" typeface="Estrangelo Edessa"/>
+        <a:font script="Syrj" typeface="Estrangelo Edessa"/>
+        <a:font script="Syre" typeface="Estrangelo Edessa"/>
+        <a:font script="Sora" typeface="Nirmala UI"/>
+        <a:font script="Tale" typeface="Microsoft Tai Le"/>
+        <a:font script="Talu" typeface="Microsoft New Tai Lue"/>
+        <a:font script="Tfng" typeface="Ebrima"/>
+      </a:majorFont>
+      <a:minorFont>
+        <a:latin typeface="Aptos" panose="02110004020202020204"/>
+        <a:ea typeface=""/>
+        <a:cs typeface=""/>
+        <a:font script="Jpan" typeface="游ゴシック"/>
+        <a:font script="Hang" typeface="맑은 고딕"/>
+        <a:font script="Hans" typeface="等线"/>
+        <a:font script="Hant" typeface="新細明體"/>
+        <a:font script="Arab" typeface="Arial"/>
+        <a:font script="Hebr" typeface="Arial"/>
+        <a:font script="Thai" typeface="Cordia New"/>
+        <a:font script="Ethi" typeface="Nyala"/>
+        <a:font script="Beng" typeface="Vrinda"/>
+        <a:font script="Gujr" typeface="Shruti"/>
+        <a:font script="Khmr" typeface="DaunPenh"/>
+        <a:font script="Knda" typeface="Tunga"/>
+        <a:font script="Guru" typeface="Raavi"/>
+        <a:font script="Cans" typeface="Euphemia"/>
+        <a:font script="Cher" typeface="Plantagenet Cherokee"/>
+        <a:font script="Yiii" typeface="Microsoft Yi Baiti"/>
+        <a:font script="Tibt" typeface="Microsoft Himalaya"/>
+        <a:font script="Thaa" typeface="MV Boli"/>
+        <a:font script="Deva" typeface="Mangal"/>
+        <a:font script="Telu" typeface="Gautami"/>
+        <a:font script="Taml" typeface="Latha"/>
+        <a:font script="Syrc" typeface="Estrangelo Edessa"/>
+        <a:font script="Orya" typeface="Kalinga"/>
+        <a:font script="Mlym" typeface="Kartika"/>
+        <a:font script="Laoo" typeface="DokChampa"/>
+        <a:font script="Sinh" typeface="Iskoola Pota"/>
+        <a:font script="Mong" typeface="Mongolian Baiti"/>
+        <a:font script="Viet" typeface="Arial"/>
+        <a:font script="Uigh" typeface="Microsoft Uighur"/>
+        <a:font script="Geor" typeface="Sylfaen"/>
+        <a:font script="Armn" typeface="Arial"/>
+        <a:font script="Bugi" typeface="Leelawadee UI"/>
+        <a:font script="Bopo" typeface="Microsoft JhengHei"/>
+        <a:font script="Java" typeface="Javanese Text"/>
+        <a:font script="Lisu" typeface="Segoe UI"/>
+        <a:font script="Mymr" typeface="Myanmar Text"/>
+        <a:font script="Nkoo" typeface="Ebrima"/>
+        <a:font script="Olck" typeface="Nirmala UI"/>
+        <a:font script="Osma" typeface="Ebrima"/>
+        <a:font script="Phag" typeface="Phagspa"/>
+        <a:font script="Syrn" typeface="Estrangelo Edessa"/>
+        <a:font script="Syrj" typeface="Estrangelo Edessa"/>
+        <a:font script="Syre" typeface="Estrangelo Edessa"/>
+        <a:font script="Sora" typeface="Nirmala UI"/>
+        <a:font script="Tale" typeface="Microsoft Tai Le"/>
+        <a:font script="Talu" typeface="Microsoft New Tai Lue"/>
+        <a:font script="Tfng" typeface="Ebrima"/>
+      </a:minorFont>
+    </a:fontScheme>
+    <a:fmtScheme name="Office">
+      <a:fillStyleLst>
+        <a:solidFill>
+          <a:schemeClr val="phClr"/>
+        </a:solidFill>
+        <a:gradFill rotWithShape="1">
+          <a:gsLst>
+            <a:gs pos="0">
+              <a:schemeClr val="phClr">
+                <a:lumMod val="110000"/>
+                <a:satMod val="105000"/>
+                <a:tint val="67000"/>
+              </a:schemeClr>
+            </a:gs>
+            <a:gs pos="50000">
+              <a:schemeClr val="phClr">
+                <a:lumMod val="105000"/>
+                <a:satMod val="103000"/>
+                <a:tint val="73000"/>
+              </a:schemeClr>
+            </a:gs>
+            <a:gs pos="100000">
+              <a:schemeClr val="phClr">
+                <a:lumMod val="105000"/>
+                <a:satMod val="109000"/>
+                <a:tint val="81000"/>
+              </a:schemeClr>
+            </a:gs>
+          </a:gsLst>
+          <a:lin ang="5400000" scaled="0"/>
+        </a:gradFill>
+        <a:gradFill rotWithShape="1">
+          <a:gsLst>
+            <a:gs pos="0">
+              <a:schemeClr val="phClr">
+                <a:satMod val="103000"/>
+                <a:lumMod val="102000"/>
+                <a:tint val="94000"/>
+              </a:schemeClr>
+            </a:gs>
+            <a:gs pos="50000">
+              <a:schemeClr val="phClr">
+                <a:satMod val="110000"/>
+                <a:lumMod val="100000"/>
+                <a:shade val="100000"/>
+              </a:schemeClr>
+            </a:gs>
+            <a:gs pos="100000">
+              <a:schemeClr val="phClr">
+                <a:lumMod val="99000"/>
+                <a:satMod val="120000"/>
+                <a:shade val="78000"/>
+              </a:schemeClr>
+            </a:gs>
+          </a:gsLst>
+          <a:lin ang="5400000" scaled="0"/>
+        </a:gradFill>
+      </a:fillStyleLst>
+      <a:lnStyleLst>
+        <a:ln w="12700" cap="flat" cmpd="sng" algn="ctr">
+          <a:solidFill>
+            <a:schemeClr val="phClr"/>
+          </a:solidFill>
+          <a:prstDash val="solid"/>
+          <a:miter lim="800000"/>
+        </a:ln>
+        <a:ln w="19050" cap="flat" cmpd="sng" algn="ctr">
+          <a:solidFill>
+            <a:schemeClr val="phClr"/>
+          </a:solidFill>
+          <a:prstDash val="solid"/>
+          <a:miter lim="800000"/>
+        </a:ln>
+        <a:ln w="25400" cap="flat" cmpd="sng" algn="ctr">
+          <a:solidFill>
+            <a:schemeClr val="phClr"/>
+          </a:solidFill>
+          <a:prstDash val="solid"/>
+          <a:miter lim="800000"/>
+        </a:ln>
+      </a:lnStyleLst>
+      <a:effectStyleLst>
+        <a:effectStyle>
+          <a:effectLst/>
+        </a:effectStyle>
+        <a:effectStyle>
+          <a:effectLst/>
+        </a:effectStyle>
+        <a:effectStyle>
+          <a:effectLst>
+            <a:outerShdw blurRad="57150" dist="19050" dir="5400000" algn="ctr" rotWithShape="0">
+              <a:srgbClr val="000000">
+                <a:alpha val="63000"/>
+              </a:srgbClr>
+            </a:outerShdw>
+          </a:effectLst>
+        </a:effectStyle>
+      </a:effectStyleLst>
+      <a:bgFillStyleLst>
+        <a:solidFill>
+          <a:schemeClr val="phClr"/>
+        </a:solidFill>
+        <a:solidFill>
+          <a:schemeClr val="phClr">
+            <a:tint val="95000"/>
+            <a:satMod val="170000"/>
+          </a:schemeClr>
+        </a:solidFill>
+        <a:gradFill rotWithShape="1">
+          <a:gsLst>
+            <a:gs pos="0">
+              <a:schemeClr val="phClr">
+                <a:tint val="93000"/>
+                <a:satMod val="150000"/>
+                <a:shade val="98000"/>
+                <a:lumMod val="102000"/>
+              </a:schemeClr>
+            </a:gs>
+            <a:gs pos="50000">
+              <a:schemeClr val="phClr">
+                <a:tint val="98000"/>
+                <a:satMod val="130000"/>
+                <a:shade val="90000"/>
+                <a:lumMod val="103000"/>
+              </a:schemeClr>
+            </a:gs>
+            <a:gs pos="100000">
+              <a:schemeClr val="phClr">
+                <a:shade val="63000"/>
+                <a:satMod val="120000"/>
+              </a:schemeClr>
+            </a:gs>
+          </a:gsLst>
+          <a:lin ang="5400000" scaled="0"/>
+        </a:gradFill>
+      </a:bgFillStyleLst>
+    </a:fmtScheme>
+  </a:themeElements>
+  <a:objectDefaults>
+    <a:lnDef>
+      <a:spPr/>
+      <a:bodyPr/>
+      <a:lstStyle/>
+      <a:style>
+        <a:lnRef idx="2">
+          <a:schemeClr val="accent1"/>
+        </a:lnRef>
+        <a:fillRef idx="0">
+          <a:schemeClr val="accent1"/>
+        </a:fillRef>
+        <a:effectRef idx="1">
+          <a:schemeClr val="accent1"/>
+        </a:effectRef>
+        <a:fontRef idx="minor">
+          <a:schemeClr val="tx1"/>
+        </a:fontRef>
+      </a:style>
+    </a:lnDef>
+  </a:objectDefaults>
+  <a:extraClrSchemeLst/>
+  <a:extLst>
+    <a:ext uri="{05A4C25C-085E-4340-85A3-A5531E510DB2}">
+      <thm15:themeFamily xmlns:thm15="http://schemas.microsoft.com/office/thememl/2012/main" name="Office Theme" id="{2E142A2C-CD16-42D6-873A-C26D2A0506FA}" vid="{1BDDFF52-6CD6-40A5-AB3C-68EB2F1E4D0A}"/>
+    </a:ext>
+  </a:extLst>
+</a:theme>
 </file>